--- a/output/olympic_holidays_report.pptx
+++ b/output/olympic_holidays_report.pptx
@@ -12,6 +12,10 @@
     <p:sldId id="260" r:id="rId11"/>
     <p:sldId id="261" r:id="rId12"/>
     <p:sldId id="262" r:id="rId13"/>
+    <p:sldId id="263" r:id="rId14"/>
+    <p:sldId id="264" r:id="rId15"/>
+    <p:sldId id="265" r:id="rId16"/>
+    <p:sldId id="266" r:id="rId17"/>
   </p:sldIdLst>
   <p:sldSz cx="12191695" cy="6858000" type="screen4x3"/>
   <p:notesSz cx="6858000" cy="9144000"/>
@@ -3201,7 +3205,7 @@
               </a:defRPr>
             </a:pPr>
             <a:r>
-              <a:t>Revenue declined across the review period, while efficiency weakened as CPA moved 86.6% from the starting month.</a:t>
+              <a:t>Q1 2026 delivered £372,830 revenue from 209.2 purchases on £72,456 spend.</a:t>
             </a:r>
           </a:p>
           <a:p>
@@ -3216,7 +3220,7 @@
               </a:defRPr>
             </a:pPr>
             <a:r>
-              <a:t>Best revenue month was Jan 2026 at £205,977.</a:t>
+              <a:t>Quarter efficiency closed at £346 CPA, £31 cost per ATC, and £1,782 AOV.</a:t>
             </a:r>
           </a:p>
           <a:p>
@@ -3231,7 +3235,7 @@
               </a:defRPr>
             </a:pPr>
             <a:r>
-              <a:t>YoY revenue for matched months is down 59.9% versus 2025.</a:t>
+              <a:t>Jan 2026 was the strongest revenue month, while Jan 2026 recorded the most efficient CPA.</a:t>
             </a:r>
           </a:p>
           <a:p>
@@ -3246,7 +3250,405 @@
               </a:defRPr>
             </a:pPr>
             <a:r>
-              <a:t>End-period efficiency did not materially deteriorate versus the previous month.</a:t>
+              <a:t>Versus Q1 2025, revenue moved -47.3%, cost moved -12.5%, and purchases moved -43.4%.</a:t>
+            </a:r>
+          </a:p>
+        </p:txBody>
+      </p:sp>
+    </p:spTree>
+  </p:cSld>
+  <p:clrMapOvr>
+    <a:masterClrMapping/>
+  </p:clrMapOvr>
+</p:sld>
+</file>
+
+<file path=ppt/slides/slide10.xml><?xml version="1.0" encoding="utf-8"?>
+<p:sld xmlns:a="http://schemas.openxmlformats.org/drawingml/2006/main" xmlns:p="http://schemas.openxmlformats.org/presentationml/2006/main" xmlns:r="http://schemas.openxmlformats.org/officeDocument/2006/relationships">
+  <p:cSld>
+    <p:bg>
+      <p:bgPr>
+        <a:solidFill>
+          <a:srgbClr val="F7F9FC"/>
+        </a:solidFill>
+        <a:effectLst/>
+      </p:bgPr>
+    </p:bg>
+    <p:spTree>
+      <p:nvGrpSpPr>
+        <p:cNvPr id="1" name=""/>
+        <p:cNvGrpSpPr/>
+        <p:nvPr/>
+      </p:nvGrpSpPr>
+      <p:grpSpPr/>
+      <p:sp>
+        <p:nvSpPr>
+          <p:cNvPr id="2" name="TextBox 1"/>
+          <p:cNvSpPr txBox="1"/>
+          <p:nvPr/>
+        </p:nvSpPr>
+        <p:spPr>
+          <a:xfrm>
+            <a:off x="548640" y="256032"/>
+            <a:ext cx="10972800" cy="548640"/>
+          </a:xfrm>
+          <a:prstGeom prst="rect">
+            <a:avLst/>
+          </a:prstGeom>
+          <a:noFill/>
+        </p:spPr>
+        <p:txBody>
+          <a:bodyPr wrap="none">
+            <a:spAutoFit/>
+          </a:bodyPr>
+          <a:lstStyle/>
+          <a:p>
+            <a:r>
+              <a:rPr sz="2400" b="1">
+                <a:solidFill>
+                  <a:srgbClr val="142A4D"/>
+                </a:solidFill>
+              </a:rPr>
+              <a:t>Generic Performance</a:t>
+            </a:r>
+          </a:p>
+        </p:txBody>
+      </p:sp>
+      <p:sp>
+        <p:nvSpPr>
+          <p:cNvPr id="3" name="TextBox 2"/>
+          <p:cNvSpPr txBox="1"/>
+          <p:nvPr/>
+        </p:nvSpPr>
+        <p:spPr>
+          <a:xfrm>
+            <a:off x="548640" y="822960"/>
+            <a:ext cx="10972800" cy="274320"/>
+          </a:xfrm>
+          <a:prstGeom prst="rect">
+            <a:avLst/>
+          </a:prstGeom>
+          <a:noFill/>
+        </p:spPr>
+        <p:txBody>
+          <a:bodyPr wrap="none">
+            <a:spAutoFit/>
+          </a:bodyPr>
+          <a:lstStyle/>
+          <a:p>
+            <a:r>
+              <a:rPr sz="1200">
+                <a:solidFill>
+                  <a:srgbClr val="5A5A5A"/>
+                </a:solidFill>
+              </a:rPr>
+              <a:t>Olympic Holidays | Q1 2026</a:t>
+            </a:r>
+          </a:p>
+        </p:txBody>
+      </p:sp>
+      <p:pic>
+        <p:nvPicPr>
+          <p:cNvPr id="4" name="Picture 3" descr="generic_performance.png"/>
+          <p:cNvPicPr>
+            <a:picLocks noChangeAspect="1"/>
+          </p:cNvPicPr>
+          <p:nvPr/>
+        </p:nvPicPr>
+        <p:blipFill>
+          <a:blip r:embed="rId2"/>
+          <a:stretch>
+            <a:fillRect/>
+          </a:stretch>
+        </p:blipFill>
+        <p:spPr>
+          <a:xfrm>
+            <a:off x="548640" y="1188720"/>
+            <a:ext cx="6583680" cy="4389120"/>
+          </a:xfrm>
+          <a:prstGeom prst="rect">
+            <a:avLst/>
+          </a:prstGeom>
+        </p:spPr>
+      </p:pic>
+      <p:sp>
+        <p:nvSpPr>
+          <p:cNvPr id="5" name="TextBox 4"/>
+          <p:cNvSpPr txBox="1"/>
+          <p:nvPr/>
+        </p:nvSpPr>
+        <p:spPr>
+          <a:xfrm>
+            <a:off x="7452360" y="1325880"/>
+            <a:ext cx="3840480" cy="4389120"/>
+          </a:xfrm>
+          <a:prstGeom prst="rect">
+            <a:avLst/>
+          </a:prstGeom>
+          <a:noFill/>
+        </p:spPr>
+        <p:txBody>
+          <a:bodyPr wrap="none">
+            <a:spAutoFit/>
+          </a:bodyPr>
+          <a:lstStyle/>
+          <a:p>
+            <a:pPr>
+              <a:spcAft>
+                <a:spcPts val="1000"/>
+              </a:spcAft>
+              <a:defRPr sz="1300">
+                <a:solidFill>
+                  <a:srgbClr val="2D2D2D"/>
+                </a:solidFill>
+              </a:defRPr>
+            </a:pPr>
+            <a:r>
+              <a:t>Generic delivered £85,032 revenue from £49,665 spend at £1,036 CPA.</a:t>
+            </a:r>
+          </a:p>
+          <a:p>
+            <a:pPr>
+              <a:spcAft>
+                <a:spcPts val="1000"/>
+              </a:spcAft>
+              <a:defRPr sz="1300">
+                <a:solidFill>
+                  <a:srgbClr val="2D2D2D"/>
+                </a:solidFill>
+              </a:defRPr>
+            </a:pPr>
+            <a:r>
+              <a:t>Jan 2026 was the strongest generic revenue month in the quarter.</a:t>
+            </a:r>
+          </a:p>
+          <a:p>
+            <a:pPr>
+              <a:spcAft>
+                <a:spcPts val="1000"/>
+              </a:spcAft>
+              <a:defRPr sz="1300">
+                <a:solidFill>
+                  <a:srgbClr val="2D2D2D"/>
+                </a:solidFill>
+              </a:defRPr>
+            </a:pPr>
+            <a:r>
+              <a:t>From Jan 2026 to Mar 2026, generic revenue moved -36.8% and CPA moved +15.2%.</a:t>
+            </a:r>
+          </a:p>
+          <a:p>
+            <a:pPr>
+              <a:spcAft>
+                <a:spcPts val="1000"/>
+              </a:spcAft>
+              <a:defRPr sz="1300">
+                <a:solidFill>
+                  <a:srgbClr val="2D2D2D"/>
+                </a:solidFill>
+              </a:defRPr>
+            </a:pPr>
+            <a:r>
+              <a:t>Generic add-to-cart volume totalled 746.5, with £67 cost per ATC and £1,773 AOV.</a:t>
+            </a:r>
+          </a:p>
+        </p:txBody>
+      </p:sp>
+    </p:spTree>
+  </p:cSld>
+  <p:clrMapOvr>
+    <a:masterClrMapping/>
+  </p:clrMapOvr>
+</p:sld>
+</file>
+
+<file path=ppt/slides/slide11.xml><?xml version="1.0" encoding="utf-8"?>
+<p:sld xmlns:a="http://schemas.openxmlformats.org/drawingml/2006/main" xmlns:p="http://schemas.openxmlformats.org/presentationml/2006/main" xmlns:r="http://schemas.openxmlformats.org/officeDocument/2006/relationships">
+  <p:cSld>
+    <p:bg>
+      <p:bgPr>
+        <a:solidFill>
+          <a:srgbClr val="F7F9FC"/>
+        </a:solidFill>
+        <a:effectLst/>
+      </p:bgPr>
+    </p:bg>
+    <p:spTree>
+      <p:nvGrpSpPr>
+        <p:cNvPr id="1" name=""/>
+        <p:cNvGrpSpPr/>
+        <p:nvPr/>
+      </p:nvGrpSpPr>
+      <p:grpSpPr/>
+      <p:sp>
+        <p:nvSpPr>
+          <p:cNvPr id="2" name="TextBox 1"/>
+          <p:cNvSpPr txBox="1"/>
+          <p:nvPr/>
+        </p:nvSpPr>
+        <p:spPr>
+          <a:xfrm>
+            <a:off x="548640" y="256032"/>
+            <a:ext cx="10972800" cy="548640"/>
+          </a:xfrm>
+          <a:prstGeom prst="rect">
+            <a:avLst/>
+          </a:prstGeom>
+          <a:noFill/>
+        </p:spPr>
+        <p:txBody>
+          <a:bodyPr wrap="none">
+            <a:spAutoFit/>
+          </a:bodyPr>
+          <a:lstStyle/>
+          <a:p>
+            <a:r>
+              <a:rPr sz="2400" b="1">
+                <a:solidFill>
+                  <a:srgbClr val="142A4D"/>
+                </a:solidFill>
+              </a:rPr>
+              <a:t>ATC Analysis</a:t>
+            </a:r>
+          </a:p>
+        </p:txBody>
+      </p:sp>
+      <p:sp>
+        <p:nvSpPr>
+          <p:cNvPr id="3" name="TextBox 2"/>
+          <p:cNvSpPr txBox="1"/>
+          <p:nvPr/>
+        </p:nvSpPr>
+        <p:spPr>
+          <a:xfrm>
+            <a:off x="548640" y="822960"/>
+            <a:ext cx="10972800" cy="274320"/>
+          </a:xfrm>
+          <a:prstGeom prst="rect">
+            <a:avLst/>
+          </a:prstGeom>
+          <a:noFill/>
+        </p:spPr>
+        <p:txBody>
+          <a:bodyPr wrap="none">
+            <a:spAutoFit/>
+          </a:bodyPr>
+          <a:lstStyle/>
+          <a:p>
+            <a:r>
+              <a:rPr sz="1200">
+                <a:solidFill>
+                  <a:srgbClr val="5A5A5A"/>
+                </a:solidFill>
+              </a:rPr>
+              <a:t>Add to cart and cost per ATC</a:t>
+            </a:r>
+          </a:p>
+        </p:txBody>
+      </p:sp>
+      <p:pic>
+        <p:nvPicPr>
+          <p:cNvPr id="4" name="Picture 3" descr="atc_analysis.png"/>
+          <p:cNvPicPr>
+            <a:picLocks noChangeAspect="1"/>
+          </p:cNvPicPr>
+          <p:nvPr/>
+        </p:nvPicPr>
+        <p:blipFill>
+          <a:blip r:embed="rId2"/>
+          <a:stretch>
+            <a:fillRect/>
+          </a:stretch>
+        </p:blipFill>
+        <p:spPr>
+          <a:xfrm>
+            <a:off x="548640" y="1188720"/>
+            <a:ext cx="6583680" cy="4389120"/>
+          </a:xfrm>
+          <a:prstGeom prst="rect">
+            <a:avLst/>
+          </a:prstGeom>
+        </p:spPr>
+      </p:pic>
+      <p:sp>
+        <p:nvSpPr>
+          <p:cNvPr id="5" name="TextBox 4"/>
+          <p:cNvSpPr txBox="1"/>
+          <p:nvPr/>
+        </p:nvSpPr>
+        <p:spPr>
+          <a:xfrm>
+            <a:off x="7452360" y="1325880"/>
+            <a:ext cx="3840480" cy="4389120"/>
+          </a:xfrm>
+          <a:prstGeom prst="rect">
+            <a:avLst/>
+          </a:prstGeom>
+          <a:noFill/>
+        </p:spPr>
+        <p:txBody>
+          <a:bodyPr wrap="none">
+            <a:spAutoFit/>
+          </a:bodyPr>
+          <a:lstStyle/>
+          <a:p>
+            <a:pPr>
+              <a:spcAft>
+                <a:spcPts val="1000"/>
+              </a:spcAft>
+              <a:defRPr sz="1300">
+                <a:solidFill>
+                  <a:srgbClr val="2D2D2D"/>
+                </a:solidFill>
+              </a:defRPr>
+            </a:pPr>
+            <a:r>
+              <a:t>Add-to-cart volume moved -59.0% from Jan 2026 to Mar 2026.</a:t>
+            </a:r>
+          </a:p>
+          <a:p>
+            <a:pPr>
+              <a:spcAft>
+                <a:spcPts val="1000"/>
+              </a:spcAft>
+              <a:defRPr sz="1300">
+                <a:solidFill>
+                  <a:srgbClr val="2D2D2D"/>
+                </a:solidFill>
+              </a:defRPr>
+            </a:pPr>
+            <a:r>
+              <a:t>Cost per ATC moved +58.3% across the same period.</a:t>
+            </a:r>
+          </a:p>
+          <a:p>
+            <a:pPr>
+              <a:spcAft>
+                <a:spcPts val="1000"/>
+              </a:spcAft>
+              <a:defRPr sz="1300">
+                <a:solidFill>
+                  <a:srgbClr val="2D2D2D"/>
+                </a:solidFill>
+              </a:defRPr>
+            </a:pPr>
+            <a:r>
+              <a:t>The quarter delivered 2331.2 total add-to-cart actions from £72,456 spend.</a:t>
+            </a:r>
+          </a:p>
+          <a:p>
+            <a:pPr>
+              <a:spcAft>
+                <a:spcPts val="1000"/>
+              </a:spcAft>
+              <a:defRPr sz="1300">
+                <a:solidFill>
+                  <a:srgbClr val="2D2D2D"/>
+                </a:solidFill>
+              </a:defRPr>
+            </a:pPr>
+            <a:r>
+              <a:t>Purchases totalled 209.2, providing the downstream conversion context for ATC performance.</a:t>
             </a:r>
           </a:p>
         </p:txBody>
@@ -3305,7 +3707,7 @@
                   <a:srgbClr val="142A4D"/>
                 </a:solidFill>
               </a:rPr>
-              <a:t>Time Series GB 20251220 1217 20260320 1217</a:t>
+              <a:t>Cyprus Trends</a:t>
             </a:r>
           </a:p>
         </p:txBody>
@@ -3345,7 +3747,7 @@
       </p:sp>
       <p:pic>
         <p:nvPicPr>
-          <p:cNvPr id="4" name="Picture 3" descr="time_series_gb_20251220_1217_20260320_1217_csv.png"/>
+          <p:cNvPr id="4" name="Picture 3" descr="cyprus_trends_csv.png"/>
           <p:cNvPicPr>
             <a:picLocks noChangeAspect="1"/>
           </p:cNvPicPr>
@@ -3400,7 +3802,7 @@
               </a:defRPr>
             </a:pPr>
             <a:r>
-              <a:t>Peak interest occurred in Feb 2026 with an indexed value of 30.5.</a:t>
+              <a:t>Peak interest occurred in Mar 2026 with an indexed value of 39.4.</a:t>
             </a:r>
           </a:p>
           <a:p>
@@ -3415,7 +3817,7 @@
               </a:defRPr>
             </a:pPr>
             <a:r>
-              <a:t>Latest month interest fell from 30.5 to 20.4.</a:t>
+              <a:t>Latest month interest rose from 24.4 to 39.4.</a:t>
             </a:r>
           </a:p>
         </p:txBody>
@@ -3429,6 +3831,344 @@
 </file>
 
 <file path=ppt/slides/slide3.xml><?xml version="1.0" encoding="utf-8"?>
+<p:sld xmlns:a="http://schemas.openxmlformats.org/drawingml/2006/main" xmlns:p="http://schemas.openxmlformats.org/presentationml/2006/main" xmlns:r="http://schemas.openxmlformats.org/officeDocument/2006/relationships">
+  <p:cSld>
+    <p:bg>
+      <p:bgPr>
+        <a:solidFill>
+          <a:srgbClr val="F7F9FC"/>
+        </a:solidFill>
+        <a:effectLst/>
+      </p:bgPr>
+    </p:bg>
+    <p:spTree>
+      <p:nvGrpSpPr>
+        <p:cNvPr id="1" name=""/>
+        <p:cNvGrpSpPr/>
+        <p:nvPr/>
+      </p:nvGrpSpPr>
+      <p:grpSpPr/>
+      <p:sp>
+        <p:nvSpPr>
+          <p:cNvPr id="2" name="TextBox 1"/>
+          <p:cNvSpPr txBox="1"/>
+          <p:nvPr/>
+        </p:nvSpPr>
+        <p:spPr>
+          <a:xfrm>
+            <a:off x="548640" y="256032"/>
+            <a:ext cx="10972800" cy="548640"/>
+          </a:xfrm>
+          <a:prstGeom prst="rect">
+            <a:avLst/>
+          </a:prstGeom>
+          <a:noFill/>
+        </p:spPr>
+        <p:txBody>
+          <a:bodyPr wrap="none">
+            <a:spAutoFit/>
+          </a:bodyPr>
+          <a:lstStyle/>
+          <a:p>
+            <a:r>
+              <a:rPr sz="2400" b="1">
+                <a:solidFill>
+                  <a:srgbClr val="142A4D"/>
+                </a:solidFill>
+              </a:rPr>
+              <a:t>Greece Trends</a:t>
+            </a:r>
+          </a:p>
+        </p:txBody>
+      </p:sp>
+      <p:sp>
+        <p:nvSpPr>
+          <p:cNvPr id="3" name="TextBox 2"/>
+          <p:cNvSpPr txBox="1"/>
+          <p:nvPr/>
+        </p:nvSpPr>
+        <p:spPr>
+          <a:xfrm>
+            <a:off x="548640" y="822960"/>
+            <a:ext cx="10972800" cy="274320"/>
+          </a:xfrm>
+          <a:prstGeom prst="rect">
+            <a:avLst/>
+          </a:prstGeom>
+          <a:noFill/>
+        </p:spPr>
+        <p:txBody>
+          <a:bodyPr wrap="none">
+            <a:spAutoFit/>
+          </a:bodyPr>
+          <a:lstStyle/>
+          <a:p>
+            <a:r>
+              <a:rPr sz="1200">
+                <a:solidFill>
+                  <a:srgbClr val="5A5A5A"/>
+                </a:solidFill>
+              </a:rPr>
+              <a:t>Google Trends</a:t>
+            </a:r>
+          </a:p>
+        </p:txBody>
+      </p:sp>
+      <p:pic>
+        <p:nvPicPr>
+          <p:cNvPr id="4" name="Picture 3" descr="greece_trends_csv.png"/>
+          <p:cNvPicPr>
+            <a:picLocks noChangeAspect="1"/>
+          </p:cNvPicPr>
+          <p:nvPr/>
+        </p:nvPicPr>
+        <p:blipFill>
+          <a:blip r:embed="rId2"/>
+          <a:stretch>
+            <a:fillRect/>
+          </a:stretch>
+        </p:blipFill>
+        <p:spPr>
+          <a:xfrm>
+            <a:off x="548640" y="1188720"/>
+            <a:ext cx="6583680" cy="4389120"/>
+          </a:xfrm>
+          <a:prstGeom prst="rect">
+            <a:avLst/>
+          </a:prstGeom>
+        </p:spPr>
+      </p:pic>
+      <p:sp>
+        <p:nvSpPr>
+          <p:cNvPr id="5" name="TextBox 4"/>
+          <p:cNvSpPr txBox="1"/>
+          <p:nvPr/>
+        </p:nvSpPr>
+        <p:spPr>
+          <a:xfrm>
+            <a:off x="7452360" y="1325880"/>
+            <a:ext cx="3840480" cy="4389120"/>
+          </a:xfrm>
+          <a:prstGeom prst="rect">
+            <a:avLst/>
+          </a:prstGeom>
+          <a:noFill/>
+        </p:spPr>
+        <p:txBody>
+          <a:bodyPr wrap="none">
+            <a:spAutoFit/>
+          </a:bodyPr>
+          <a:lstStyle/>
+          <a:p>
+            <a:pPr>
+              <a:spcAft>
+                <a:spcPts val="1000"/>
+              </a:spcAft>
+              <a:defRPr sz="1300">
+                <a:solidFill>
+                  <a:srgbClr val="2D2D2D"/>
+                </a:solidFill>
+              </a:defRPr>
+            </a:pPr>
+            <a:r>
+              <a:t>Peak interest occurred in Jan 2026 with an indexed value of 62.6.</a:t>
+            </a:r>
+          </a:p>
+          <a:p>
+            <a:pPr>
+              <a:spcAft>
+                <a:spcPts val="1000"/>
+              </a:spcAft>
+              <a:defRPr sz="1300">
+                <a:solidFill>
+                  <a:srgbClr val="2D2D2D"/>
+                </a:solidFill>
+              </a:defRPr>
+            </a:pPr>
+            <a:r>
+              <a:t>Latest month interest fell from 46.5 to 45.4.</a:t>
+            </a:r>
+          </a:p>
+        </p:txBody>
+      </p:sp>
+    </p:spTree>
+  </p:cSld>
+  <p:clrMapOvr>
+    <a:masterClrMapping/>
+  </p:clrMapOvr>
+</p:sld>
+</file>
+
+<file path=ppt/slides/slide4.xml><?xml version="1.0" encoding="utf-8"?>
+<p:sld xmlns:a="http://schemas.openxmlformats.org/drawingml/2006/main" xmlns:p="http://schemas.openxmlformats.org/presentationml/2006/main" xmlns:r="http://schemas.openxmlformats.org/officeDocument/2006/relationships">
+  <p:cSld>
+    <p:bg>
+      <p:bgPr>
+        <a:solidFill>
+          <a:srgbClr val="F7F9FC"/>
+        </a:solidFill>
+        <a:effectLst/>
+      </p:bgPr>
+    </p:bg>
+    <p:spTree>
+      <p:nvGrpSpPr>
+        <p:cNvPr id="1" name=""/>
+        <p:cNvGrpSpPr/>
+        <p:nvPr/>
+      </p:nvGrpSpPr>
+      <p:grpSpPr/>
+      <p:sp>
+        <p:nvSpPr>
+          <p:cNvPr id="2" name="TextBox 1"/>
+          <p:cNvSpPr txBox="1"/>
+          <p:nvPr/>
+        </p:nvSpPr>
+        <p:spPr>
+          <a:xfrm>
+            <a:off x="548640" y="256032"/>
+            <a:ext cx="10972800" cy="548640"/>
+          </a:xfrm>
+          <a:prstGeom prst="rect">
+            <a:avLst/>
+          </a:prstGeom>
+          <a:noFill/>
+        </p:spPr>
+        <p:txBody>
+          <a:bodyPr wrap="none">
+            <a:spAutoFit/>
+          </a:bodyPr>
+          <a:lstStyle/>
+          <a:p>
+            <a:r>
+              <a:rPr sz="2400" b="1">
+                <a:solidFill>
+                  <a:srgbClr val="142A4D"/>
+                </a:solidFill>
+              </a:rPr>
+              <a:t>OH Trends</a:t>
+            </a:r>
+          </a:p>
+        </p:txBody>
+      </p:sp>
+      <p:sp>
+        <p:nvSpPr>
+          <p:cNvPr id="3" name="TextBox 2"/>
+          <p:cNvSpPr txBox="1"/>
+          <p:nvPr/>
+        </p:nvSpPr>
+        <p:spPr>
+          <a:xfrm>
+            <a:off x="548640" y="822960"/>
+            <a:ext cx="10972800" cy="274320"/>
+          </a:xfrm>
+          <a:prstGeom prst="rect">
+            <a:avLst/>
+          </a:prstGeom>
+          <a:noFill/>
+        </p:spPr>
+        <p:txBody>
+          <a:bodyPr wrap="none">
+            <a:spAutoFit/>
+          </a:bodyPr>
+          <a:lstStyle/>
+          <a:p>
+            <a:r>
+              <a:rPr sz="1200">
+                <a:solidFill>
+                  <a:srgbClr val="5A5A5A"/>
+                </a:solidFill>
+              </a:rPr>
+              <a:t>Google Trends</a:t>
+            </a:r>
+          </a:p>
+        </p:txBody>
+      </p:sp>
+      <p:pic>
+        <p:nvPicPr>
+          <p:cNvPr id="4" name="Picture 3" descr="oh_trends_csv.png"/>
+          <p:cNvPicPr>
+            <a:picLocks noChangeAspect="1"/>
+          </p:cNvPicPr>
+          <p:nvPr/>
+        </p:nvPicPr>
+        <p:blipFill>
+          <a:blip r:embed="rId2"/>
+          <a:stretch>
+            <a:fillRect/>
+          </a:stretch>
+        </p:blipFill>
+        <p:spPr>
+          <a:xfrm>
+            <a:off x="548640" y="1188720"/>
+            <a:ext cx="6583680" cy="4389120"/>
+          </a:xfrm>
+          <a:prstGeom prst="rect">
+            <a:avLst/>
+          </a:prstGeom>
+        </p:spPr>
+      </p:pic>
+      <p:sp>
+        <p:nvSpPr>
+          <p:cNvPr id="5" name="TextBox 4"/>
+          <p:cNvSpPr txBox="1"/>
+          <p:nvPr/>
+        </p:nvSpPr>
+        <p:spPr>
+          <a:xfrm>
+            <a:off x="7452360" y="1325880"/>
+            <a:ext cx="3840480" cy="4389120"/>
+          </a:xfrm>
+          <a:prstGeom prst="rect">
+            <a:avLst/>
+          </a:prstGeom>
+          <a:noFill/>
+        </p:spPr>
+        <p:txBody>
+          <a:bodyPr wrap="none">
+            <a:spAutoFit/>
+          </a:bodyPr>
+          <a:lstStyle/>
+          <a:p>
+            <a:pPr>
+              <a:spcAft>
+                <a:spcPts val="1000"/>
+              </a:spcAft>
+              <a:defRPr sz="1300">
+                <a:solidFill>
+                  <a:srgbClr val="2D2D2D"/>
+                </a:solidFill>
+              </a:defRPr>
+            </a:pPr>
+            <a:r>
+              <a:t>Peak interest occurred in Mar 2026 with an indexed value of 30.5.</a:t>
+            </a:r>
+          </a:p>
+          <a:p>
+            <a:pPr>
+              <a:spcAft>
+                <a:spcPts val="1000"/>
+              </a:spcAft>
+              <a:defRPr sz="1300">
+                <a:solidFill>
+                  <a:srgbClr val="2D2D2D"/>
+                </a:solidFill>
+              </a:defRPr>
+            </a:pPr>
+            <a:r>
+              <a:t>Latest month interest rose from 0.0 to 30.5.</a:t>
+            </a:r>
+          </a:p>
+        </p:txBody>
+      </p:sp>
+    </p:spTree>
+  </p:cSld>
+  <p:clrMapOvr>
+    <a:masterClrMapping/>
+  </p:clrMapOvr>
+</p:sld>
+</file>
+
+<file path=ppt/slides/slide5.xml><?xml version="1.0" encoding="utf-8"?>
 <p:sld xmlns:a="http://schemas.openxmlformats.org/drawingml/2006/main" xmlns:p="http://schemas.openxmlformats.org/presentationml/2006/main" xmlns:r="http://schemas.openxmlformats.org/officeDocument/2006/relationships">
   <p:cSld>
     <p:bg>
@@ -3539,14 +4279,14 @@
                 <a:gridCol w="1071154"/>
                 <a:gridCol w="1071155"/>
               </a:tblGrid>
-              <a:tr h="375920">
-                <a:tc>
-                  <a:txBody>
-                    <a:bodyPr/>
-                    <a:lstStyle/>
-                    <a:p>
-                      <a:r>
-                        <a:rPr b="1" sz="1000">
+              <a:tr h="260252">
+                <a:tc>
+                  <a:txBody>
+                    <a:bodyPr/>
+                    <a:lstStyle/>
+                    <a:p>
+                      <a:r>
+                        <a:rPr b="1" sz="750">
                           <a:solidFill>
                             <a:srgbClr val="142A4D"/>
                           </a:solidFill>
@@ -3567,7 +4307,7 @@
                     <a:lstStyle/>
                     <a:p>
                       <a:r>
-                        <a:rPr b="1" sz="1000">
+                        <a:rPr b="1" sz="750">
                           <a:solidFill>
                             <a:srgbClr val="142A4D"/>
                           </a:solidFill>
@@ -3588,7 +4328,7 @@
                     <a:lstStyle/>
                     <a:p>
                       <a:r>
-                        <a:rPr b="1" sz="1000">
+                        <a:rPr b="1" sz="750">
                           <a:solidFill>
                             <a:srgbClr val="142A4D"/>
                           </a:solidFill>
@@ -3609,7 +4349,7 @@
                     <a:lstStyle/>
                     <a:p>
                       <a:r>
-                        <a:rPr b="1" sz="1000">
+                        <a:rPr b="1" sz="750">
                           <a:solidFill>
                             <a:srgbClr val="142A4D"/>
                           </a:solidFill>
@@ -3630,7 +4370,7 @@
                     <a:lstStyle/>
                     <a:p>
                       <a:r>
-                        <a:rPr b="1" sz="1000">
+                        <a:rPr b="1" sz="750">
                           <a:solidFill>
                             <a:srgbClr val="142A4D"/>
                           </a:solidFill>
@@ -3651,7 +4391,7 @@
                     <a:lstStyle/>
                     <a:p>
                       <a:r>
-                        <a:rPr b="1" sz="1000">
+                        <a:rPr b="1" sz="750">
                           <a:solidFill>
                             <a:srgbClr val="142A4D"/>
                           </a:solidFill>
@@ -3672,7 +4412,7 @@
                     <a:lstStyle/>
                     <a:p>
                       <a:r>
-                        <a:rPr b="1" sz="1000">
+                        <a:rPr b="1" sz="750">
                           <a:solidFill>
                             <a:srgbClr val="142A4D"/>
                           </a:solidFill>
@@ -3688,31 +4428,757 @@
                   </a:tcPr>
                 </a:tc>
               </a:tr>
-              <a:tr h="375920">
-                <a:tc>
-                  <a:txBody>
-                    <a:bodyPr/>
-                    <a:lstStyle/>
-                    <a:p>
-                      <a:r>
-                        <a:rPr b="0" sz="1000">
-                          <a:solidFill>
-                            <a:srgbClr val="142A4D"/>
-                          </a:solidFill>
-                        </a:rPr>
-                        <a:t>airbnb.co.uk</a:t>
-                      </a:r>
-                    </a:p>
-                  </a:txBody>
-                  <a:tcPr/>
-                </a:tc>
-                <a:tc>
-                  <a:txBody>
-                    <a:bodyPr/>
-                    <a:lstStyle/>
-                    <a:p>
-                      <a:r>
-                        <a:rPr b="0" sz="1000">
+              <a:tr h="260252">
+                <a:tc>
+                  <a:txBody>
+                    <a:bodyPr/>
+                    <a:lstStyle/>
+                    <a:p>
+                      <a:r>
+                        <a:rPr b="0" sz="750">
+                          <a:solidFill>
+                            <a:srgbClr val="142A4D"/>
+                          </a:solidFill>
+                        </a:rPr>
+                        <a:t>jet2holidays.com</a:t>
+                      </a:r>
+                    </a:p>
+                  </a:txBody>
+                  <a:tcPr/>
+                </a:tc>
+                <a:tc>
+                  <a:txBody>
+                    <a:bodyPr/>
+                    <a:lstStyle/>
+                    <a:p>
+                      <a:r>
+                        <a:rPr b="0" sz="750">
+                          <a:solidFill>
+                            <a:srgbClr val="142A4D"/>
+                          </a:solidFill>
+                        </a:rPr>
+                        <a:t>57.3%</a:t>
+                      </a:r>
+                    </a:p>
+                  </a:txBody>
+                  <a:tcPr/>
+                </a:tc>
+                <a:tc>
+                  <a:txBody>
+                    <a:bodyPr/>
+                    <a:lstStyle/>
+                    <a:p>
+                      <a:r>
+                        <a:rPr b="0" sz="750">
+                          <a:solidFill>
+                            <a:srgbClr val="142A4D"/>
+                          </a:solidFill>
+                        </a:rPr>
+                        <a:t>35.5%</a:t>
+                      </a:r>
+                    </a:p>
+                  </a:txBody>
+                  <a:tcPr/>
+                </a:tc>
+                <a:tc>
+                  <a:txBody>
+                    <a:bodyPr/>
+                    <a:lstStyle/>
+                    <a:p>
+                      <a:r>
+                        <a:rPr b="0" sz="750">
+                          <a:solidFill>
+                            <a:srgbClr val="142A4D"/>
+                          </a:solidFill>
+                        </a:rPr>
+                        <a:t>83.6%</a:t>
+                      </a:r>
+                    </a:p>
+                  </a:txBody>
+                  <a:tcPr/>
+                </a:tc>
+                <a:tc>
+                  <a:txBody>
+                    <a:bodyPr/>
+                    <a:lstStyle/>
+                    <a:p>
+                      <a:r>
+                        <a:rPr b="0" sz="750">
+                          <a:solidFill>
+                            <a:srgbClr val="142A4D"/>
+                          </a:solidFill>
+                        </a:rPr>
+                        <a:t>90.8%</a:t>
+                      </a:r>
+                    </a:p>
+                  </a:txBody>
+                  <a:tcPr/>
+                </a:tc>
+                <a:tc>
+                  <a:txBody>
+                    <a:bodyPr/>
+                    <a:lstStyle/>
+                    <a:p>
+                      <a:r>
+                        <a:rPr b="0" sz="750">
+                          <a:solidFill>
+                            <a:srgbClr val="142A4D"/>
+                          </a:solidFill>
+                        </a:rPr>
+                        <a:t>52.1%</a:t>
+                      </a:r>
+                    </a:p>
+                  </a:txBody>
+                  <a:tcPr/>
+                </a:tc>
+                <a:tc>
+                  <a:txBody>
+                    <a:bodyPr/>
+                    <a:lstStyle/>
+                    <a:p>
+                      <a:r>
+                        <a:rPr b="0" sz="750">
+                          <a:solidFill>
+                            <a:srgbClr val="142A4D"/>
+                          </a:solidFill>
+                        </a:rPr>
+                        <a:t>6.7%</a:t>
+                      </a:r>
+                    </a:p>
+                  </a:txBody>
+                  <a:tcPr/>
+                </a:tc>
+              </a:tr>
+              <a:tr h="260252">
+                <a:tc>
+                  <a:txBody>
+                    <a:bodyPr/>
+                    <a:lstStyle/>
+                    <a:p>
+                      <a:r>
+                        <a:rPr b="0" sz="750">
+                          <a:solidFill>
+                            <a:srgbClr val="142A4D"/>
+                          </a:solidFill>
+                        </a:rPr>
+                        <a:t>loveholidays.com</a:t>
+                      </a:r>
+                    </a:p>
+                  </a:txBody>
+                  <a:tcPr/>
+                </a:tc>
+                <a:tc>
+                  <a:txBody>
+                    <a:bodyPr/>
+                    <a:lstStyle/>
+                    <a:p>
+                      <a:r>
+                        <a:rPr b="0" sz="750">
+                          <a:solidFill>
+                            <a:srgbClr val="142A4D"/>
+                          </a:solidFill>
+                        </a:rPr>
+                        <a:t>48.8%</a:t>
+                      </a:r>
+                    </a:p>
+                  </a:txBody>
+                  <a:tcPr/>
+                </a:tc>
+                <a:tc>
+                  <a:txBody>
+                    <a:bodyPr/>
+                    <a:lstStyle/>
+                    <a:p>
+                      <a:r>
+                        <a:rPr b="0" sz="750">
+                          <a:solidFill>
+                            <a:srgbClr val="142A4D"/>
+                          </a:solidFill>
+                        </a:rPr>
+                        <a:t>27.3%</a:t>
+                      </a:r>
+                    </a:p>
+                  </a:txBody>
+                  <a:tcPr/>
+                </a:tc>
+                <a:tc>
+                  <a:txBody>
+                    <a:bodyPr/>
+                    <a:lstStyle/>
+                    <a:p>
+                      <a:r>
+                        <a:rPr b="0" sz="750">
+                          <a:solidFill>
+                            <a:srgbClr val="142A4D"/>
+                          </a:solidFill>
+                        </a:rPr>
+                        <a:t>71.0%</a:t>
+                      </a:r>
+                    </a:p>
+                  </a:txBody>
+                  <a:tcPr/>
+                </a:tc>
+                <a:tc>
+                  <a:txBody>
+                    <a:bodyPr/>
+                    <a:lstStyle/>
+                    <a:p>
+                      <a:r>
+                        <a:rPr b="0" sz="750">
+                          <a:solidFill>
+                            <a:srgbClr val="142A4D"/>
+                          </a:solidFill>
+                        </a:rPr>
+                        <a:t>85.5%</a:t>
+                      </a:r>
+                    </a:p>
+                  </a:txBody>
+                  <a:tcPr/>
+                </a:tc>
+                <a:tc>
+                  <a:txBody>
+                    <a:bodyPr/>
+                    <a:lstStyle/>
+                    <a:p>
+                      <a:r>
+                        <a:rPr b="0" sz="750">
+                          <a:solidFill>
+                            <a:srgbClr val="142A4D"/>
+                          </a:solidFill>
+                        </a:rPr>
+                        <a:t>25.1%</a:t>
+                      </a:r>
+                    </a:p>
+                  </a:txBody>
+                  <a:tcPr/>
+                </a:tc>
+                <a:tc>
+                  <a:txBody>
+                    <a:bodyPr/>
+                    <a:lstStyle/>
+                    <a:p>
+                      <a:r>
+                        <a:rPr b="0" sz="750">
+                          <a:solidFill>
+                            <a:srgbClr val="142A4D"/>
+                          </a:solidFill>
+                        </a:rPr>
+                        <a:t>7.7%</a:t>
+                      </a:r>
+                    </a:p>
+                  </a:txBody>
+                  <a:tcPr/>
+                </a:tc>
+              </a:tr>
+              <a:tr h="260252">
+                <a:tc>
+                  <a:txBody>
+                    <a:bodyPr/>
+                    <a:lstStyle/>
+                    <a:p>
+                      <a:r>
+                        <a:rPr b="0" sz="750">
+                          <a:solidFill>
+                            <a:srgbClr val="142A4D"/>
+                          </a:solidFill>
+                        </a:rPr>
+                        <a:t>tui.co.uk</a:t>
+                      </a:r>
+                    </a:p>
+                  </a:txBody>
+                  <a:tcPr/>
+                </a:tc>
+                <a:tc>
+                  <a:txBody>
+                    <a:bodyPr/>
+                    <a:lstStyle/>
+                    <a:p>
+                      <a:r>
+                        <a:rPr b="0" sz="750">
+                          <a:solidFill>
+                            <a:srgbClr val="142A4D"/>
+                          </a:solidFill>
+                        </a:rPr>
+                        <a:t>45.7%</a:t>
+                      </a:r>
+                    </a:p>
+                  </a:txBody>
+                  <a:tcPr/>
+                </a:tc>
+                <a:tc>
+                  <a:txBody>
+                    <a:bodyPr/>
+                    <a:lstStyle/>
+                    <a:p>
+                      <a:r>
+                        <a:rPr b="0" sz="750">
+                          <a:solidFill>
+                            <a:srgbClr val="142A4D"/>
+                          </a:solidFill>
+                        </a:rPr>
+                        <a:t>28.9%</a:t>
+                      </a:r>
+                    </a:p>
+                  </a:txBody>
+                  <a:tcPr/>
+                </a:tc>
+                <a:tc>
+                  <a:txBody>
+                    <a:bodyPr/>
+                    <a:lstStyle/>
+                    <a:p>
+                      <a:r>
+                        <a:rPr b="0" sz="750">
+                          <a:solidFill>
+                            <a:srgbClr val="142A4D"/>
+                          </a:solidFill>
+                        </a:rPr>
+                        <a:t>78.4%</a:t>
+                      </a:r>
+                    </a:p>
+                  </a:txBody>
+                  <a:tcPr/>
+                </a:tc>
+                <a:tc>
+                  <a:txBody>
+                    <a:bodyPr/>
+                    <a:lstStyle/>
+                    <a:p>
+                      <a:r>
+                        <a:rPr b="0" sz="750">
+                          <a:solidFill>
+                            <a:srgbClr val="142A4D"/>
+                          </a:solidFill>
+                        </a:rPr>
+                        <a:t>89.1%</a:t>
+                      </a:r>
+                    </a:p>
+                  </a:txBody>
+                  <a:tcPr/>
+                </a:tc>
+                <a:tc>
+                  <a:txBody>
+                    <a:bodyPr/>
+                    <a:lstStyle/>
+                    <a:p>
+                      <a:r>
+                        <a:rPr b="0" sz="750">
+                          <a:solidFill>
+                            <a:srgbClr val="142A4D"/>
+                          </a:solidFill>
+                        </a:rPr>
+                        <a:t>25.5%</a:t>
+                      </a:r>
+                    </a:p>
+                  </a:txBody>
+                  <a:tcPr/>
+                </a:tc>
+                <a:tc>
+                  <a:txBody>
+                    <a:bodyPr/>
+                    <a:lstStyle/>
+                    <a:p>
+                      <a:r>
+                        <a:rPr b="0" sz="750">
+                          <a:solidFill>
+                            <a:srgbClr val="142A4D"/>
+                          </a:solidFill>
+                        </a:rPr>
+                        <a:t>7.3%</a:t>
+                      </a:r>
+                    </a:p>
+                  </a:txBody>
+                  <a:tcPr/>
+                </a:tc>
+              </a:tr>
+              <a:tr h="260252">
+                <a:tc>
+                  <a:txBody>
+                    <a:bodyPr/>
+                    <a:lstStyle/>
+                    <a:p>
+                      <a:r>
+                        <a:rPr b="0" sz="750">
+                          <a:solidFill>
+                            <a:srgbClr val="142A4D"/>
+                          </a:solidFill>
+                        </a:rPr>
+                        <a:t>easyjet.com</a:t>
+                      </a:r>
+                    </a:p>
+                  </a:txBody>
+                  <a:tcPr/>
+                </a:tc>
+                <a:tc>
+                  <a:txBody>
+                    <a:bodyPr/>
+                    <a:lstStyle/>
+                    <a:p>
+                      <a:r>
+                        <a:rPr b="0" sz="750">
+                          <a:solidFill>
+                            <a:srgbClr val="142A4D"/>
+                          </a:solidFill>
+                        </a:rPr>
+                        <a:t>30.0%</a:t>
+                      </a:r>
+                    </a:p>
+                  </a:txBody>
+                  <a:tcPr/>
+                </a:tc>
+                <a:tc>
+                  <a:txBody>
+                    <a:bodyPr/>
+                    <a:lstStyle/>
+                    <a:p>
+                      <a:r>
+                        <a:rPr b="0" sz="750">
+                          <a:solidFill>
+                            <a:srgbClr val="142A4D"/>
+                          </a:solidFill>
+                        </a:rPr>
+                        <a:t>18.3%</a:t>
+                      </a:r>
+                    </a:p>
+                  </a:txBody>
+                  <a:tcPr/>
+                </a:tc>
+                <a:tc>
+                  <a:txBody>
+                    <a:bodyPr/>
+                    <a:lstStyle/>
+                    <a:p>
+                      <a:r>
+                        <a:rPr b="0" sz="750">
+                          <a:solidFill>
+                            <a:srgbClr val="142A4D"/>
+                          </a:solidFill>
+                        </a:rPr>
+                        <a:t>69.8%</a:t>
+                      </a:r>
+                    </a:p>
+                  </a:txBody>
+                  <a:tcPr/>
+                </a:tc>
+                <a:tc>
+                  <a:txBody>
+                    <a:bodyPr/>
+                    <a:lstStyle/>
+                    <a:p>
+                      <a:r>
+                        <a:rPr b="0" sz="750">
+                          <a:solidFill>
+                            <a:srgbClr val="142A4D"/>
+                          </a:solidFill>
+                        </a:rPr>
+                        <a:t>83.5%</a:t>
+                      </a:r>
+                    </a:p>
+                  </a:txBody>
+                  <a:tcPr/>
+                </a:tc>
+                <a:tc>
+                  <a:txBody>
+                    <a:bodyPr/>
+                    <a:lstStyle/>
+                    <a:p>
+                      <a:r>
+                        <a:rPr b="0" sz="750">
+                          <a:solidFill>
+                            <a:srgbClr val="142A4D"/>
+                          </a:solidFill>
+                        </a:rPr>
+                        <a:t>20.3%</a:t>
+                      </a:r>
+                    </a:p>
+                  </a:txBody>
+                  <a:tcPr/>
+                </a:tc>
+                <a:tc>
+                  <a:txBody>
+                    <a:bodyPr/>
+                    <a:lstStyle/>
+                    <a:p>
+                      <a:r>
+                        <a:rPr b="0" sz="750">
+                          <a:solidFill>
+                            <a:srgbClr val="142A4D"/>
+                          </a:solidFill>
+                        </a:rPr>
+                        <a:t>8.3%</a:t>
+                      </a:r>
+                    </a:p>
+                  </a:txBody>
+                  <a:tcPr/>
+                </a:tc>
+              </a:tr>
+              <a:tr h="260252">
+                <a:tc>
+                  <a:txBody>
+                    <a:bodyPr/>
+                    <a:lstStyle/>
+                    <a:p>
+                      <a:r>
+                        <a:rPr b="0" sz="750">
+                          <a:solidFill>
+                            <a:srgbClr val="142A4D"/>
+                          </a:solidFill>
+                        </a:rPr>
+                        <a:t>onthebeach.co.uk</a:t>
+                      </a:r>
+                    </a:p>
+                  </a:txBody>
+                  <a:tcPr/>
+                </a:tc>
+                <a:tc>
+                  <a:txBody>
+                    <a:bodyPr/>
+                    <a:lstStyle/>
+                    <a:p>
+                      <a:r>
+                        <a:rPr b="0" sz="750">
+                          <a:solidFill>
+                            <a:srgbClr val="142A4D"/>
+                          </a:solidFill>
+                        </a:rPr>
+                        <a:t>16.9%</a:t>
+                      </a:r>
+                    </a:p>
+                  </a:txBody>
+                  <a:tcPr/>
+                </a:tc>
+                <a:tc>
+                  <a:txBody>
+                    <a:bodyPr/>
+                    <a:lstStyle/>
+                    <a:p>
+                      <a:r>
+                        <a:rPr b="0" sz="750">
+                          <a:solidFill>
+                            <a:srgbClr val="142A4D"/>
+                          </a:solidFill>
+                        </a:rPr>
+                        <a:t>10.3%</a:t>
+                      </a:r>
+                    </a:p>
+                  </a:txBody>
+                  <a:tcPr/>
+                </a:tc>
+                <a:tc>
+                  <a:txBody>
+                    <a:bodyPr/>
+                    <a:lstStyle/>
+                    <a:p>
+                      <a:r>
+                        <a:rPr b="0" sz="750">
+                          <a:solidFill>
+                            <a:srgbClr val="142A4D"/>
+                          </a:solidFill>
+                        </a:rPr>
+                        <a:t>47.7%</a:t>
+                      </a:r>
+                    </a:p>
+                  </a:txBody>
+                  <a:tcPr/>
+                </a:tc>
+                <a:tc>
+                  <a:txBody>
+                    <a:bodyPr/>
+                    <a:lstStyle/>
+                    <a:p>
+                      <a:r>
+                        <a:rPr b="0" sz="750">
+                          <a:solidFill>
+                            <a:srgbClr val="142A4D"/>
+                          </a:solidFill>
+                        </a:rPr>
+                        <a:t>75.2%</a:t>
+                      </a:r>
+                    </a:p>
+                  </a:txBody>
+                  <a:tcPr/>
+                </a:tc>
+                <a:tc>
+                  <a:txBody>
+                    <a:bodyPr/>
+                    <a:lstStyle/>
+                    <a:p>
+                      <a:r>
+                        <a:rPr b="0" sz="750">
+                          <a:solidFill>
+                            <a:srgbClr val="142A4D"/>
+                          </a:solidFill>
+                        </a:rPr>
+                        <a:t>8.4%</a:t>
+                      </a:r>
+                    </a:p>
+                  </a:txBody>
+                  <a:tcPr/>
+                </a:tc>
+                <a:tc>
+                  <a:txBody>
+                    <a:bodyPr/>
+                    <a:lstStyle/>
+                    <a:p>
+                      <a:r>
+                        <a:rPr b="0" sz="750">
+                          <a:solidFill>
+                            <a:srgbClr val="142A4D"/>
+                          </a:solidFill>
+                        </a:rPr>
+                        <a:t>9.0%</a:t>
+                      </a:r>
+                    </a:p>
+                  </a:txBody>
+                  <a:tcPr/>
+                </a:tc>
+              </a:tr>
+              <a:tr h="260252">
+                <a:tc>
+                  <a:txBody>
+                    <a:bodyPr/>
+                    <a:lstStyle/>
+                    <a:p>
+                      <a:r>
+                        <a:rPr b="0" sz="750">
+                          <a:solidFill>
+                            <a:srgbClr val="142A4D"/>
+                          </a:solidFill>
+                        </a:rPr>
+                        <a:t>booking.com</a:t>
+                      </a:r>
+                    </a:p>
+                  </a:txBody>
+                  <a:tcPr/>
+                </a:tc>
+                <a:tc>
+                  <a:txBody>
+                    <a:bodyPr/>
+                    <a:lstStyle/>
+                    <a:p>
+                      <a:r>
+                        <a:rPr b="0" sz="750">
+                          <a:solidFill>
+                            <a:srgbClr val="142A4D"/>
+                          </a:solidFill>
+                        </a:rPr>
+                        <a:t>16.5%</a:t>
+                      </a:r>
+                    </a:p>
+                  </a:txBody>
+                  <a:tcPr/>
+                </a:tc>
+                <a:tc>
+                  <a:txBody>
+                    <a:bodyPr/>
+                    <a:lstStyle/>
+                    <a:p>
+                      <a:r>
+                        <a:rPr b="0" sz="750">
+                          <a:solidFill>
+                            <a:srgbClr val="142A4D"/>
+                          </a:solidFill>
+                        </a:rPr>
+                        <a:t>11.9%</a:t>
+                      </a:r>
+                    </a:p>
+                  </a:txBody>
+                  <a:tcPr/>
+                </a:tc>
+                <a:tc>
+                  <a:txBody>
+                    <a:bodyPr/>
+                    <a:lstStyle/>
+                    <a:p>
+                      <a:r>
+                        <a:rPr b="0" sz="750">
+                          <a:solidFill>
+                            <a:srgbClr val="142A4D"/>
+                          </a:solidFill>
+                        </a:rPr>
+                        <a:t>60.0%</a:t>
+                      </a:r>
+                    </a:p>
+                  </a:txBody>
+                  <a:tcPr/>
+                </a:tc>
+                <a:tc>
+                  <a:txBody>
+                    <a:bodyPr/>
+                    <a:lstStyle/>
+                    <a:p>
+                      <a:r>
+                        <a:rPr b="0" sz="750">
+                          <a:solidFill>
+                            <a:srgbClr val="142A4D"/>
+                          </a:solidFill>
+                        </a:rPr>
+                        <a:t>82.6%</a:t>
+                      </a:r>
+                    </a:p>
+                  </a:txBody>
+                  <a:tcPr/>
+                </a:tc>
+                <a:tc>
+                  <a:txBody>
+                    <a:bodyPr/>
+                    <a:lstStyle/>
+                    <a:p>
+                      <a:r>
+                        <a:rPr b="0" sz="750">
+                          <a:solidFill>
+                            <a:srgbClr val="142A4D"/>
+                          </a:solidFill>
+                        </a:rPr>
+                        <a:t>19.0%</a:t>
+                      </a:r>
+                    </a:p>
+                  </a:txBody>
+                  <a:tcPr/>
+                </a:tc>
+                <a:tc>
+                  <a:txBody>
+                    <a:bodyPr/>
+                    <a:lstStyle/>
+                    <a:p>
+                      <a:r>
+                        <a:rPr b="0" sz="750">
+                          <a:solidFill>
+                            <a:srgbClr val="142A4D"/>
+                          </a:solidFill>
+                        </a:rPr>
+                        <a:t>8.8%</a:t>
+                      </a:r>
+                    </a:p>
+                  </a:txBody>
+                  <a:tcPr/>
+                </a:tc>
+              </a:tr>
+              <a:tr h="260252">
+                <a:tc>
+                  <a:txBody>
+                    <a:bodyPr/>
+                    <a:lstStyle/>
+                    <a:p>
+                      <a:r>
+                        <a:rPr b="0" sz="750">
+                          <a:solidFill>
+                            <a:srgbClr val="142A4D"/>
+                          </a:solidFill>
+                        </a:rPr>
+                        <a:t>firstchoice.co.uk</a:t>
+                      </a:r>
+                    </a:p>
+                  </a:txBody>
+                  <a:tcPr/>
+                </a:tc>
+                <a:tc>
+                  <a:txBody>
+                    <a:bodyPr/>
+                    <a:lstStyle/>
+                    <a:p>
+                      <a:r>
+                        <a:rPr b="0" sz="750">
                           <a:solidFill>
                             <a:srgbClr val="142A4D"/>
                           </a:solidFill>
@@ -3729,75 +5195,370 @@
                     <a:lstStyle/>
                     <a:p>
                       <a:r>
-                        <a:rPr b="0" sz="1000">
-                          <a:solidFill>
-                            <a:srgbClr val="142A4D"/>
-                          </a:solidFill>
-                        </a:rPr>
-                        <a:t>6.1%</a:t>
-                      </a:r>
-                    </a:p>
-                  </a:txBody>
-                  <a:tcPr/>
-                </a:tc>
-                <a:tc>
-                  <a:txBody>
-                    <a:bodyPr/>
-                    <a:lstStyle/>
-                    <a:p>
-                      <a:r>
-                        <a:rPr b="0" sz="1000">
-                          <a:solidFill>
-                            <a:srgbClr val="142A4D"/>
-                          </a:solidFill>
-                        </a:rPr>
-                        <a:t>50.1%</a:t>
-                      </a:r>
-                    </a:p>
-                  </a:txBody>
-                  <a:tcPr/>
-                </a:tc>
-                <a:tc>
-                  <a:txBody>
-                    <a:bodyPr/>
-                    <a:lstStyle/>
-                    <a:p>
-                      <a:r>
-                        <a:rPr b="0" sz="1000">
-                          <a:solidFill>
-                            <a:srgbClr val="142A4D"/>
-                          </a:solidFill>
-                        </a:rPr>
-                        <a:t>80.2%</a:t>
-                      </a:r>
-                    </a:p>
-                  </a:txBody>
-                  <a:tcPr/>
-                </a:tc>
-                <a:tc>
-                  <a:txBody>
-                    <a:bodyPr/>
-                    <a:lstStyle/>
-                    <a:p>
-                      <a:r>
-                        <a:rPr b="0" sz="1000">
-                          <a:solidFill>
-                            <a:srgbClr val="142A4D"/>
-                          </a:solidFill>
-                        </a:rPr>
-                        <a:t>15.5%</a:t>
-                      </a:r>
-                    </a:p>
-                  </a:txBody>
-                  <a:tcPr/>
-                </a:tc>
-                <a:tc>
-                  <a:txBody>
-                    <a:bodyPr/>
-                    <a:lstStyle/>
-                    <a:p>
-                      <a:r>
-                        <a:rPr b="0" sz="1000">
+                        <a:rPr b="0" sz="750">
+                          <a:solidFill>
+                            <a:srgbClr val="142A4D"/>
+                          </a:solidFill>
+                        </a:rPr>
+                        <a:t>6.6%</a:t>
+                      </a:r>
+                    </a:p>
+                  </a:txBody>
+                  <a:tcPr/>
+                </a:tc>
+                <a:tc>
+                  <a:txBody>
+                    <a:bodyPr/>
+                    <a:lstStyle/>
+                    <a:p>
+                      <a:r>
+                        <a:rPr b="0" sz="750">
+                          <a:solidFill>
+                            <a:srgbClr val="142A4D"/>
+                          </a:solidFill>
+                        </a:rPr>
+                        <a:t>44.3%</a:t>
+                      </a:r>
+                    </a:p>
+                  </a:txBody>
+                  <a:tcPr/>
+                </a:tc>
+                <a:tc>
+                  <a:txBody>
+                    <a:bodyPr/>
+                    <a:lstStyle/>
+                    <a:p>
+                      <a:r>
+                        <a:rPr b="0" sz="750">
+                          <a:solidFill>
+                            <a:srgbClr val="142A4D"/>
+                          </a:solidFill>
+                        </a:rPr>
+                        <a:t>52.0%</a:t>
+                      </a:r>
+                    </a:p>
+                  </a:txBody>
+                  <a:tcPr/>
+                </a:tc>
+                <a:tc>
+                  <a:txBody>
+                    <a:bodyPr/>
+                    <a:lstStyle/>
+                    <a:p>
+                      <a:r>
+                        <a:rPr b="0" sz="750">
+                          <a:solidFill>
+                            <a:srgbClr val="142A4D"/>
+                          </a:solidFill>
+                        </a:rPr>
+                        <a:t>6.0%</a:t>
+                      </a:r>
+                    </a:p>
+                  </a:txBody>
+                  <a:tcPr/>
+                </a:tc>
+                <a:tc>
+                  <a:txBody>
+                    <a:bodyPr/>
+                    <a:lstStyle/>
+                    <a:p>
+                      <a:r>
+                        <a:rPr b="0" sz="750">
+                          <a:solidFill>
+                            <a:srgbClr val="142A4D"/>
+                          </a:solidFill>
+                        </a:rPr>
+                        <a:t>9.2%</a:t>
+                      </a:r>
+                    </a:p>
+                  </a:txBody>
+                  <a:tcPr/>
+                </a:tc>
+              </a:tr>
+              <a:tr h="260252">
+                <a:tc>
+                  <a:txBody>
+                    <a:bodyPr/>
+                    <a:lstStyle/>
+                    <a:p>
+                      <a:r>
+                        <a:rPr b="0" sz="750">
+                          <a:solidFill>
+                            <a:srgbClr val="142A4D"/>
+                          </a:solidFill>
+                        </a:rPr>
+                        <a:t>you</a:t>
+                      </a:r>
+                    </a:p>
+                  </a:txBody>
+                  <a:tcPr/>
+                </a:tc>
+                <a:tc>
+                  <a:txBody>
+                    <a:bodyPr/>
+                    <a:lstStyle/>
+                    <a:p>
+                      <a:r>
+                        <a:rPr b="0" sz="750">
+                          <a:solidFill>
+                            <a:srgbClr val="142A4D"/>
+                          </a:solidFill>
+                        </a:rPr>
+                        <a:t>n/a</a:t>
+                      </a:r>
+                    </a:p>
+                  </a:txBody>
+                  <a:tcPr/>
+                </a:tc>
+                <a:tc>
+                  <a:txBody>
+                    <a:bodyPr/>
+                    <a:lstStyle/>
+                    <a:p>
+                      <a:r>
+                        <a:rPr b="0" sz="750">
+                          <a:solidFill>
+                            <a:srgbClr val="142A4D"/>
+                          </a:solidFill>
+                        </a:rPr>
+                        <a:t>n/a</a:t>
+                      </a:r>
+                    </a:p>
+                  </a:txBody>
+                  <a:tcPr/>
+                </a:tc>
+                <a:tc>
+                  <a:txBody>
+                    <a:bodyPr/>
+                    <a:lstStyle/>
+                    <a:p>
+                      <a:r>
+                        <a:rPr b="0" sz="750">
+                          <a:solidFill>
+                            <a:srgbClr val="142A4D"/>
+                          </a:solidFill>
+                        </a:rPr>
+                        <a:t>n/a</a:t>
+                      </a:r>
+                    </a:p>
+                  </a:txBody>
+                  <a:tcPr/>
+                </a:tc>
+                <a:tc>
+                  <a:txBody>
+                    <a:bodyPr/>
+                    <a:lstStyle/>
+                    <a:p>
+                      <a:r>
+                        <a:rPr b="0" sz="750">
+                          <a:solidFill>
+                            <a:srgbClr val="142A4D"/>
+                          </a:solidFill>
+                        </a:rPr>
+                        <a:t>78.3%</a:t>
+                      </a:r>
+                    </a:p>
+                  </a:txBody>
+                  <a:tcPr/>
+                </a:tc>
+                <a:tc>
+                  <a:txBody>
+                    <a:bodyPr/>
+                    <a:lstStyle/>
+                    <a:p>
+                      <a:r>
+                        <a:rPr b="0" sz="750">
+                          <a:solidFill>
+                            <a:srgbClr val="142A4D"/>
+                          </a:solidFill>
+                        </a:rPr>
+                        <a:t>22.1%</a:t>
+                      </a:r>
+                    </a:p>
+                  </a:txBody>
+                  <a:tcPr/>
+                </a:tc>
+                <a:tc>
+                  <a:txBody>
+                    <a:bodyPr/>
+                    <a:lstStyle/>
+                    <a:p>
+                      <a:r>
+                        <a:rPr b="0" sz="750">
+                          <a:solidFill>
+                            <a:srgbClr val="142A4D"/>
+                          </a:solidFill>
+                        </a:rPr>
+                        <a:t>n/a</a:t>
+                      </a:r>
+                    </a:p>
+                  </a:txBody>
+                  <a:tcPr/>
+                </a:tc>
+              </a:tr>
+              <a:tr h="260252">
+                <a:tc>
+                  <a:txBody>
+                    <a:bodyPr/>
+                    <a:lstStyle/>
+                    <a:p>
+                      <a:r>
+                        <a:rPr b="0" sz="750">
+                          <a:solidFill>
+                            <a:srgbClr val="142A4D"/>
+                          </a:solidFill>
+                        </a:rPr>
+                        <a:t>thomascook.com</a:t>
+                      </a:r>
+                    </a:p>
+                  </a:txBody>
+                  <a:tcPr/>
+                </a:tc>
+                <a:tc>
+                  <a:txBody>
+                    <a:bodyPr/>
+                    <a:lstStyle/>
+                    <a:p>
+                      <a:r>
+                        <a:rPr b="0" sz="750">
+                          <a:solidFill>
+                            <a:srgbClr val="142A4D"/>
+                          </a:solidFill>
+                        </a:rPr>
+                        <a:t>n/a</a:t>
+                      </a:r>
+                    </a:p>
+                  </a:txBody>
+                  <a:tcPr/>
+                </a:tc>
+                <a:tc>
+                  <a:txBody>
+                    <a:bodyPr/>
+                    <a:lstStyle/>
+                    <a:p>
+                      <a:r>
+                        <a:rPr b="0" sz="750">
+                          <a:solidFill>
+                            <a:srgbClr val="142A4D"/>
+                          </a:solidFill>
+                        </a:rPr>
+                        <a:t>5.7%</a:t>
+                      </a:r>
+                    </a:p>
+                  </a:txBody>
+                  <a:tcPr/>
+                </a:tc>
+                <a:tc>
+                  <a:txBody>
+                    <a:bodyPr/>
+                    <a:lstStyle/>
+                    <a:p>
+                      <a:r>
+                        <a:rPr b="0" sz="750">
+                          <a:solidFill>
+                            <a:srgbClr val="142A4D"/>
+                          </a:solidFill>
+                        </a:rPr>
+                        <a:t>43.9%</a:t>
+                      </a:r>
+                    </a:p>
+                  </a:txBody>
+                  <a:tcPr/>
+                </a:tc>
+                <a:tc>
+                  <a:txBody>
+                    <a:bodyPr/>
+                    <a:lstStyle/>
+                    <a:p>
+                      <a:r>
+                        <a:rPr b="0" sz="750">
+                          <a:solidFill>
+                            <a:srgbClr val="142A4D"/>
+                          </a:solidFill>
+                        </a:rPr>
+                        <a:t>56.6%</a:t>
+                      </a:r>
+                    </a:p>
+                  </a:txBody>
+                  <a:tcPr/>
+                </a:tc>
+                <a:tc>
+                  <a:txBody>
+                    <a:bodyPr/>
+                    <a:lstStyle/>
+                    <a:p>
+                      <a:r>
+                        <a:rPr b="0" sz="750">
+                          <a:solidFill>
+                            <a:srgbClr val="142A4D"/>
+                          </a:solidFill>
+                        </a:rPr>
+                        <a:t>4.9%</a:t>
+                      </a:r>
+                    </a:p>
+                  </a:txBody>
+                  <a:tcPr/>
+                </a:tc>
+                <a:tc>
+                  <a:txBody>
+                    <a:bodyPr/>
+                    <a:lstStyle/>
+                    <a:p>
+                      <a:r>
+                        <a:rPr b="0" sz="750">
+                          <a:solidFill>
+                            <a:srgbClr val="142A4D"/>
+                          </a:solidFill>
+                        </a:rPr>
+                        <a:t>9.3%</a:t>
+                      </a:r>
+                    </a:p>
+                  </a:txBody>
+                  <a:tcPr/>
+                </a:tc>
+              </a:tr>
+              <a:tr h="260252">
+                <a:tc>
+                  <a:txBody>
+                    <a:bodyPr/>
+                    <a:lstStyle/>
+                    <a:p>
+                      <a:r>
+                        <a:rPr b="0" sz="750">
+                          <a:solidFill>
+                            <a:srgbClr val="142A4D"/>
+                          </a:solidFill>
+                        </a:rPr>
+                        <a:t>travelsupermarket.com</a:t>
+                      </a:r>
+                    </a:p>
+                  </a:txBody>
+                  <a:tcPr/>
+                </a:tc>
+                <a:tc>
+                  <a:txBody>
+                    <a:bodyPr/>
+                    <a:lstStyle/>
+                    <a:p>
+                      <a:r>
+                        <a:rPr b="0" sz="750">
+                          <a:solidFill>
+                            <a:srgbClr val="142A4D"/>
+                          </a:solidFill>
+                        </a:rPr>
+                        <a:t>n/a</a:t>
+                      </a:r>
+                    </a:p>
+                  </a:txBody>
+                  <a:tcPr/>
+                </a:tc>
+                <a:tc>
+                  <a:txBody>
+                    <a:bodyPr/>
+                    <a:lstStyle/>
+                    <a:p>
+                      <a:r>
+                        <a:rPr b="0" sz="750">
                           <a:solidFill>
                             <a:srgbClr val="142A4D"/>
                           </a:solidFill>
@@ -3808,32 +5569,100 @@
                   </a:txBody>
                   <a:tcPr/>
                 </a:tc>
+                <a:tc>
+                  <a:txBody>
+                    <a:bodyPr/>
+                    <a:lstStyle/>
+                    <a:p>
+                      <a:r>
+                        <a:rPr b="0" sz="750">
+                          <a:solidFill>
+                            <a:srgbClr val="142A4D"/>
+                          </a:solidFill>
+                        </a:rPr>
+                        <a:t>40.2%</a:t>
+                      </a:r>
+                    </a:p>
+                  </a:txBody>
+                  <a:tcPr/>
+                </a:tc>
+                <a:tc>
+                  <a:txBody>
+                    <a:bodyPr/>
+                    <a:lstStyle/>
+                    <a:p>
+                      <a:r>
+                        <a:rPr b="0" sz="750">
+                          <a:solidFill>
+                            <a:srgbClr val="142A4D"/>
+                          </a:solidFill>
+                        </a:rPr>
+                        <a:t>36.3%</a:t>
+                      </a:r>
+                    </a:p>
+                  </a:txBody>
+                  <a:tcPr/>
+                </a:tc>
+                <a:tc>
+                  <a:txBody>
+                    <a:bodyPr/>
+                    <a:lstStyle/>
+                    <a:p>
+                      <a:r>
+                        <a:rPr b="0" sz="750">
+                          <a:solidFill>
+                            <a:srgbClr val="142A4D"/>
+                          </a:solidFill>
+                        </a:rPr>
+                        <a:t>3.0%</a:t>
+                      </a:r>
+                    </a:p>
+                  </a:txBody>
+                  <a:tcPr/>
+                </a:tc>
+                <a:tc>
+                  <a:txBody>
+                    <a:bodyPr/>
+                    <a:lstStyle/>
+                    <a:p>
+                      <a:r>
+                        <a:rPr b="0" sz="750">
+                          <a:solidFill>
+                            <a:srgbClr val="142A4D"/>
+                          </a:solidFill>
+                        </a:rPr>
+                        <a:t>9.3%</a:t>
+                      </a:r>
+                    </a:p>
+                  </a:txBody>
+                  <a:tcPr/>
+                </a:tc>
               </a:tr>
-              <a:tr h="375920">
-                <a:tc>
-                  <a:txBody>
-                    <a:bodyPr/>
-                    <a:lstStyle/>
-                    <a:p>
-                      <a:r>
-                        <a:rPr b="0" sz="1000">
-                          <a:solidFill>
-                            <a:srgbClr val="142A4D"/>
-                          </a:solidFill>
-                        </a:rPr>
-                        <a:t>thomascook.com</a:t>
-                      </a:r>
-                    </a:p>
-                  </a:txBody>
-                  <a:tcPr/>
-                </a:tc>
-                <a:tc>
-                  <a:txBody>
-                    <a:bodyPr/>
-                    <a:lstStyle/>
-                    <a:p>
-                      <a:r>
-                        <a:rPr b="0" sz="1000">
+              <a:tr h="260252">
+                <a:tc>
+                  <a:txBody>
+                    <a:bodyPr/>
+                    <a:lstStyle/>
+                    <a:p>
+                      <a:r>
+                        <a:rPr b="0" sz="750">
+                          <a:solidFill>
+                            <a:srgbClr val="142A4D"/>
+                          </a:solidFill>
+                        </a:rPr>
+                        <a:t>icelolly.com</a:t>
+                      </a:r>
+                    </a:p>
+                  </a:txBody>
+                  <a:tcPr/>
+                </a:tc>
+                <a:tc>
+                  <a:txBody>
+                    <a:bodyPr/>
+                    <a:lstStyle/>
+                    <a:p>
+                      <a:r>
+                        <a:rPr b="0" sz="750">
                           <a:solidFill>
                             <a:srgbClr val="142A4D"/>
                           </a:solidFill>
@@ -3850,111 +5679,111 @@
                     <a:lstStyle/>
                     <a:p>
                       <a:r>
-                        <a:rPr b="0" sz="1000">
-                          <a:solidFill>
-                            <a:srgbClr val="142A4D"/>
-                          </a:solidFill>
-                        </a:rPr>
-                        <a:t>6.9%</a:t>
-                      </a:r>
-                    </a:p>
-                  </a:txBody>
-                  <a:tcPr/>
-                </a:tc>
-                <a:tc>
-                  <a:txBody>
-                    <a:bodyPr/>
-                    <a:lstStyle/>
-                    <a:p>
-                      <a:r>
-                        <a:rPr b="0" sz="1000">
-                          <a:solidFill>
-                            <a:srgbClr val="142A4D"/>
-                          </a:solidFill>
-                        </a:rPr>
-                        <a:t>48.4%</a:t>
-                      </a:r>
-                    </a:p>
-                  </a:txBody>
-                  <a:tcPr/>
-                </a:tc>
-                <a:tc>
-                  <a:txBody>
-                    <a:bodyPr/>
-                    <a:lstStyle/>
-                    <a:p>
-                      <a:r>
-                        <a:rPr b="0" sz="1000">
-                          <a:solidFill>
-                            <a:srgbClr val="142A4D"/>
-                          </a:solidFill>
-                        </a:rPr>
-                        <a:t>65.6%</a:t>
-                      </a:r>
-                    </a:p>
-                  </a:txBody>
-                  <a:tcPr/>
-                </a:tc>
-                <a:tc>
-                  <a:txBody>
-                    <a:bodyPr/>
-                    <a:lstStyle/>
-                    <a:p>
-                      <a:r>
-                        <a:rPr b="0" sz="1000">
-                          <a:solidFill>
-                            <a:srgbClr val="142A4D"/>
-                          </a:solidFill>
-                        </a:rPr>
-                        <a:t>5.1%</a:t>
-                      </a:r>
-                    </a:p>
-                  </a:txBody>
-                  <a:tcPr/>
-                </a:tc>
-                <a:tc>
-                  <a:txBody>
-                    <a:bodyPr/>
-                    <a:lstStyle/>
-                    <a:p>
-                      <a:r>
-                        <a:rPr b="0" sz="1000">
-                          <a:solidFill>
-                            <a:srgbClr val="142A4D"/>
-                          </a:solidFill>
-                        </a:rPr>
-                        <a:t>5.4%</a:t>
+                        <a:rPr b="0" sz="750">
+                          <a:solidFill>
+                            <a:srgbClr val="142A4D"/>
+                          </a:solidFill>
+                        </a:rPr>
+                        <a:t>4.1%</a:t>
+                      </a:r>
+                    </a:p>
+                  </a:txBody>
+                  <a:tcPr/>
+                </a:tc>
+                <a:tc>
+                  <a:txBody>
+                    <a:bodyPr/>
+                    <a:lstStyle/>
+                    <a:p>
+                      <a:r>
+                        <a:rPr b="0" sz="750">
+                          <a:solidFill>
+                            <a:srgbClr val="142A4D"/>
+                          </a:solidFill>
+                        </a:rPr>
+                        <a:t>40.6%</a:t>
+                      </a:r>
+                    </a:p>
+                  </a:txBody>
+                  <a:tcPr/>
+                </a:tc>
+                <a:tc>
+                  <a:txBody>
+                    <a:bodyPr/>
+                    <a:lstStyle/>
+                    <a:p>
+                      <a:r>
+                        <a:rPr b="0" sz="750">
+                          <a:solidFill>
+                            <a:srgbClr val="142A4D"/>
+                          </a:solidFill>
+                        </a:rPr>
+                        <a:t>31.4%</a:t>
+                      </a:r>
+                    </a:p>
+                  </a:txBody>
+                  <a:tcPr/>
+                </a:tc>
+                <a:tc>
+                  <a:txBody>
+                    <a:bodyPr/>
+                    <a:lstStyle/>
+                    <a:p>
+                      <a:r>
+                        <a:rPr b="0" sz="750">
+                          <a:solidFill>
+                            <a:srgbClr val="142A4D"/>
+                          </a:solidFill>
+                        </a:rPr>
+                        <a:t>3.6%</a:t>
+                      </a:r>
+                    </a:p>
+                  </a:txBody>
+                  <a:tcPr/>
+                </a:tc>
+                <a:tc>
+                  <a:txBody>
+                    <a:bodyPr/>
+                    <a:lstStyle/>
+                    <a:p>
+                      <a:r>
+                        <a:rPr b="0" sz="750">
+                          <a:solidFill>
+                            <a:srgbClr val="142A4D"/>
+                          </a:solidFill>
+                        </a:rPr>
+                        <a:t>9.3%</a:t>
                       </a:r>
                     </a:p>
                   </a:txBody>
                   <a:tcPr/>
                 </a:tc>
               </a:tr>
-              <a:tr h="375920">
-                <a:tc>
-                  <a:txBody>
-                    <a:bodyPr/>
-                    <a:lstStyle/>
-                    <a:p>
-                      <a:r>
-                        <a:rPr b="0" sz="1000">
-                          <a:solidFill>
-                            <a:srgbClr val="142A4D"/>
-                          </a:solidFill>
-                        </a:rPr>
-                        <a:t>firstchoice.co.uk</a:t>
-                      </a:r>
-                    </a:p>
-                  </a:txBody>
-                  <a:tcPr/>
-                </a:tc>
-                <a:tc>
-                  <a:txBody>
-                    <a:bodyPr/>
-                    <a:lstStyle/>
-                    <a:p>
-                      <a:r>
-                        <a:rPr b="0" sz="1000">
+              <a:tr h="260256">
+                <a:tc>
+                  <a:txBody>
+                    <a:bodyPr/>
+                    <a:lstStyle/>
+                    <a:p>
+                      <a:r>
+                        <a:rPr b="0" sz="750">
+                          <a:solidFill>
+                            <a:srgbClr val="142A4D"/>
+                          </a:solidFill>
+                        </a:rPr>
+                        <a:t>britishairways.com</a:t>
+                      </a:r>
+                    </a:p>
+                  </a:txBody>
+                  <a:tcPr/>
+                </a:tc>
+                <a:tc>
+                  <a:txBody>
+                    <a:bodyPr/>
+                    <a:lstStyle/>
+                    <a:p>
+                      <a:r>
+                        <a:rPr b="0" sz="750">
                           <a:solidFill>
                             <a:srgbClr val="142A4D"/>
                           </a:solidFill>
@@ -3971,685 +5800,80 @@
                     <a:lstStyle/>
                     <a:p>
                       <a:r>
-                        <a:rPr b="0" sz="1000">
-                          <a:solidFill>
-                            <a:srgbClr val="142A4D"/>
-                          </a:solidFill>
-                        </a:rPr>
-                        <a:t>6.9%</a:t>
-                      </a:r>
-                    </a:p>
-                  </a:txBody>
-                  <a:tcPr/>
-                </a:tc>
-                <a:tc>
-                  <a:txBody>
-                    <a:bodyPr/>
-                    <a:lstStyle/>
-                    <a:p>
-                      <a:r>
-                        <a:rPr b="0" sz="1000">
-                          <a:solidFill>
-                            <a:srgbClr val="142A4D"/>
-                          </a:solidFill>
-                        </a:rPr>
-                        <a:t>53.5%</a:t>
-                      </a:r>
-                    </a:p>
-                  </a:txBody>
-                  <a:tcPr/>
-                </a:tc>
-                <a:tc>
-                  <a:txBody>
-                    <a:bodyPr/>
-                    <a:lstStyle/>
-                    <a:p>
-                      <a:r>
-                        <a:rPr b="0" sz="1000">
-                          <a:solidFill>
-                            <a:srgbClr val="142A4D"/>
-                          </a:solidFill>
-                        </a:rPr>
-                        <a:t>59.0%</a:t>
-                      </a:r>
-                    </a:p>
-                  </a:txBody>
-                  <a:tcPr/>
-                </a:tc>
-                <a:tc>
-                  <a:txBody>
-                    <a:bodyPr/>
-                    <a:lstStyle/>
-                    <a:p>
-                      <a:r>
-                        <a:rPr b="0" sz="1000">
-                          <a:solidFill>
-                            <a:srgbClr val="142A4D"/>
-                          </a:solidFill>
-                        </a:rPr>
-                        <a:t>2.9%</a:t>
-                      </a:r>
-                    </a:p>
-                  </a:txBody>
-                  <a:tcPr/>
-                </a:tc>
-                <a:tc>
-                  <a:txBody>
-                    <a:bodyPr/>
-                    <a:lstStyle/>
-                    <a:p>
-                      <a:r>
-                        <a:rPr b="0" sz="1000">
-                          <a:solidFill>
-                            <a:srgbClr val="142A4D"/>
-                          </a:solidFill>
-                        </a:rPr>
-                        <a:t>5.4%</a:t>
-                      </a:r>
-                    </a:p>
-                  </a:txBody>
-                  <a:tcPr/>
-                </a:tc>
-              </a:tr>
-              <a:tr h="375920">
-                <a:tc>
-                  <a:txBody>
-                    <a:bodyPr/>
-                    <a:lstStyle/>
-                    <a:p>
-                      <a:r>
-                        <a:rPr b="0" sz="1000">
-                          <a:solidFill>
-                            <a:srgbClr val="142A4D"/>
-                          </a:solidFill>
-                        </a:rPr>
-                        <a:t>britishairways.com</a:t>
-                      </a:r>
-                    </a:p>
-                  </a:txBody>
-                  <a:tcPr/>
-                </a:tc>
-                <a:tc>
-                  <a:txBody>
-                    <a:bodyPr/>
-                    <a:lstStyle/>
-                    <a:p>
-                      <a:r>
-                        <a:rPr b="0" sz="1000">
-                          <a:solidFill>
-                            <a:srgbClr val="142A4D"/>
-                          </a:solidFill>
-                        </a:rPr>
-                        <a:t>n/a</a:t>
-                      </a:r>
-                    </a:p>
-                  </a:txBody>
-                  <a:tcPr/>
-                </a:tc>
-                <a:tc>
-                  <a:txBody>
-                    <a:bodyPr/>
-                    <a:lstStyle/>
-                    <a:p>
-                      <a:r>
-                        <a:rPr b="0" sz="1000">
-                          <a:solidFill>
-                            <a:srgbClr val="142A4D"/>
-                          </a:solidFill>
-                        </a:rPr>
-                        <a:t>4.2%</a:t>
-                      </a:r>
-                    </a:p>
-                  </a:txBody>
-                  <a:tcPr/>
-                </a:tc>
-                <a:tc>
-                  <a:txBody>
-                    <a:bodyPr/>
-                    <a:lstStyle/>
-                    <a:p>
-                      <a:r>
-                        <a:rPr b="0" sz="1000">
-                          <a:solidFill>
-                            <a:srgbClr val="142A4D"/>
-                          </a:solidFill>
-                        </a:rPr>
-                        <a:t>54.0%</a:t>
-                      </a:r>
-                    </a:p>
-                  </a:txBody>
-                  <a:tcPr/>
-                </a:tc>
-                <a:tc>
-                  <a:txBody>
-                    <a:bodyPr/>
-                    <a:lstStyle/>
-                    <a:p>
-                      <a:r>
-                        <a:rPr b="0" sz="1000">
-                          <a:solidFill>
-                            <a:srgbClr val="142A4D"/>
-                          </a:solidFill>
-                        </a:rPr>
-                        <a:t>77.5%</a:t>
-                      </a:r>
-                    </a:p>
-                  </a:txBody>
-                  <a:tcPr/>
-                </a:tc>
-                <a:tc>
-                  <a:txBody>
-                    <a:bodyPr/>
-                    <a:lstStyle/>
-                    <a:p>
-                      <a:r>
-                        <a:rPr b="0" sz="1000">
-                          <a:solidFill>
-                            <a:srgbClr val="142A4D"/>
-                          </a:solidFill>
-                        </a:rPr>
-                        <a:t>12.7%</a:t>
-                      </a:r>
-                    </a:p>
-                  </a:txBody>
-                  <a:tcPr/>
-                </a:tc>
-                <a:tc>
-                  <a:txBody>
-                    <a:bodyPr/>
-                    <a:lstStyle/>
-                    <a:p>
-                      <a:r>
-                        <a:rPr b="0" sz="1000">
-                          <a:solidFill>
-                            <a:srgbClr val="142A4D"/>
-                          </a:solidFill>
-                        </a:rPr>
-                        <a:t>5.4%</a:t>
-                      </a:r>
-                    </a:p>
-                  </a:txBody>
-                  <a:tcPr/>
-                </a:tc>
-              </a:tr>
-              <a:tr h="375920">
-                <a:tc>
-                  <a:txBody>
-                    <a:bodyPr/>
-                    <a:lstStyle/>
-                    <a:p>
-                      <a:r>
-                        <a:rPr b="0" sz="1000">
-                          <a:solidFill>
-                            <a:srgbClr val="142A4D"/>
-                          </a:solidFill>
-                        </a:rPr>
-                        <a:t>you</a:t>
-                      </a:r>
-                    </a:p>
-                  </a:txBody>
-                  <a:tcPr/>
-                </a:tc>
-                <a:tc>
-                  <a:txBody>
-                    <a:bodyPr/>
-                    <a:lstStyle/>
-                    <a:p>
-                      <a:r>
-                        <a:rPr b="0" sz="1000">
-                          <a:solidFill>
-                            <a:srgbClr val="142A4D"/>
-                          </a:solidFill>
-                        </a:rPr>
-                        <a:t>n/a</a:t>
-                      </a:r>
-                    </a:p>
-                  </a:txBody>
-                  <a:tcPr/>
-                </a:tc>
-                <a:tc>
-                  <a:txBody>
-                    <a:bodyPr/>
-                    <a:lstStyle/>
-                    <a:p>
-                      <a:r>
-                        <a:rPr b="0" sz="1000">
-                          <a:solidFill>
-                            <a:srgbClr val="142A4D"/>
-                          </a:solidFill>
-                        </a:rPr>
-                        <a:t>n/a</a:t>
-                      </a:r>
-                    </a:p>
-                  </a:txBody>
-                  <a:tcPr/>
-                </a:tc>
-                <a:tc>
-                  <a:txBody>
-                    <a:bodyPr/>
-                    <a:lstStyle/>
-                    <a:p>
-                      <a:r>
-                        <a:rPr b="0" sz="1000">
-                          <a:solidFill>
-                            <a:srgbClr val="142A4D"/>
-                          </a:solidFill>
-                        </a:rPr>
-                        <a:t>n/a</a:t>
-                      </a:r>
-                    </a:p>
-                  </a:txBody>
-                  <a:tcPr/>
-                </a:tc>
-                <a:tc>
-                  <a:txBody>
-                    <a:bodyPr/>
-                    <a:lstStyle/>
-                    <a:p>
-                      <a:r>
-                        <a:rPr b="0" sz="1000">
-                          <a:solidFill>
-                            <a:srgbClr val="142A4D"/>
-                          </a:solidFill>
-                        </a:rPr>
-                        <a:t>77.1%</a:t>
-                      </a:r>
-                    </a:p>
-                  </a:txBody>
-                  <a:tcPr/>
-                </a:tc>
-                <a:tc>
-                  <a:txBody>
-                    <a:bodyPr/>
-                    <a:lstStyle/>
-                    <a:p>
-                      <a:r>
-                        <a:rPr b="0" sz="1000">
-                          <a:solidFill>
-                            <a:srgbClr val="142A4D"/>
-                          </a:solidFill>
-                        </a:rPr>
-                        <a:t>16.2%</a:t>
-                      </a:r>
-                    </a:p>
-                  </a:txBody>
-                  <a:tcPr/>
-                </a:tc>
-                <a:tc>
-                  <a:txBody>
-                    <a:bodyPr/>
-                    <a:lstStyle/>
-                    <a:p>
-                      <a:r>
-                        <a:rPr b="0" sz="1000">
-                          <a:solidFill>
-                            <a:srgbClr val="142A4D"/>
-                          </a:solidFill>
-                        </a:rPr>
-                        <a:t>n/a</a:t>
-                      </a:r>
-                    </a:p>
-                  </a:txBody>
-                  <a:tcPr/>
-                </a:tc>
-              </a:tr>
-              <a:tr h="375920">
-                <a:tc>
-                  <a:txBody>
-                    <a:bodyPr/>
-                    <a:lstStyle/>
-                    <a:p>
-                      <a:r>
-                        <a:rPr b="0" sz="1000">
-                          <a:solidFill>
-                            <a:srgbClr val="142A4D"/>
-                          </a:solidFill>
-                        </a:rPr>
-                        <a:t>jet2holidays.com</a:t>
-                      </a:r>
-                    </a:p>
-                  </a:txBody>
-                  <a:tcPr/>
-                </a:tc>
-                <a:tc>
-                  <a:txBody>
-                    <a:bodyPr/>
-                    <a:lstStyle/>
-                    <a:p>
-                      <a:r>
-                        <a:rPr b="0" sz="1000">
-                          <a:solidFill>
-                            <a:srgbClr val="142A4D"/>
-                          </a:solidFill>
-                        </a:rPr>
-                        <a:t>64.1%</a:t>
-                      </a:r>
-                    </a:p>
-                  </a:txBody>
-                  <a:tcPr/>
-                </a:tc>
-                <a:tc>
-                  <a:txBody>
-                    <a:bodyPr/>
-                    <a:lstStyle/>
-                    <a:p>
-                      <a:r>
-                        <a:rPr b="0" sz="1000">
-                          <a:solidFill>
-                            <a:srgbClr val="142A4D"/>
-                          </a:solidFill>
-                        </a:rPr>
-                        <a:t>56.5%</a:t>
-                      </a:r>
-                    </a:p>
-                  </a:txBody>
-                  <a:tcPr/>
-                </a:tc>
-                <a:tc>
-                  <a:txBody>
-                    <a:bodyPr/>
-                    <a:lstStyle/>
-                    <a:p>
-                      <a:r>
-                        <a:rPr b="0" sz="1000">
-                          <a:solidFill>
-                            <a:srgbClr val="142A4D"/>
-                          </a:solidFill>
-                        </a:rPr>
-                        <a:t>82.8%</a:t>
-                      </a:r>
-                    </a:p>
-                  </a:txBody>
-                  <a:tcPr/>
-                </a:tc>
-                <a:tc>
-                  <a:txBody>
-                    <a:bodyPr/>
-                    <a:lstStyle/>
-                    <a:p>
-                      <a:r>
-                        <a:rPr b="0" sz="1000">
-                          <a:solidFill>
-                            <a:srgbClr val="142A4D"/>
-                          </a:solidFill>
-                        </a:rPr>
-                        <a:t>90.5%</a:t>
-                      </a:r>
-                    </a:p>
-                  </a:txBody>
-                  <a:tcPr/>
-                </a:tc>
-                <a:tc>
-                  <a:txBody>
-                    <a:bodyPr/>
-                    <a:lstStyle/>
-                    <a:p>
-                      <a:r>
-                        <a:rPr b="0" sz="1000">
-                          <a:solidFill>
-                            <a:srgbClr val="142A4D"/>
-                          </a:solidFill>
-                        </a:rPr>
-                        <a:t>50.1%</a:t>
-                      </a:r>
-                    </a:p>
-                  </a:txBody>
-                  <a:tcPr/>
-                </a:tc>
-                <a:tc>
-                  <a:txBody>
-                    <a:bodyPr/>
-                    <a:lstStyle/>
-                    <a:p>
-                      <a:r>
-                        <a:rPr b="0" sz="1000">
-                          <a:solidFill>
-                            <a:srgbClr val="142A4D"/>
-                          </a:solidFill>
-                        </a:rPr>
-                        <a:t>3.0%</a:t>
-                      </a:r>
-                    </a:p>
-                  </a:txBody>
-                  <a:tcPr/>
-                </a:tc>
-              </a:tr>
-              <a:tr h="375920">
-                <a:tc>
-                  <a:txBody>
-                    <a:bodyPr/>
-                    <a:lstStyle/>
-                    <a:p>
-                      <a:r>
-                        <a:rPr b="0" sz="1000">
-                          <a:solidFill>
-                            <a:srgbClr val="142A4D"/>
-                          </a:solidFill>
-                        </a:rPr>
-                        <a:t>tui.co.uk</a:t>
-                      </a:r>
-                    </a:p>
-                  </a:txBody>
-                  <a:tcPr/>
-                </a:tc>
-                <a:tc>
-                  <a:txBody>
-                    <a:bodyPr/>
-                    <a:lstStyle/>
-                    <a:p>
-                      <a:r>
-                        <a:rPr b="0" sz="1000">
-                          <a:solidFill>
-                            <a:srgbClr val="142A4D"/>
-                          </a:solidFill>
-                        </a:rPr>
-                        <a:t>52.0%</a:t>
-                      </a:r>
-                    </a:p>
-                  </a:txBody>
-                  <a:tcPr/>
-                </a:tc>
-                <a:tc>
-                  <a:txBody>
-                    <a:bodyPr/>
-                    <a:lstStyle/>
-                    <a:p>
-                      <a:r>
-                        <a:rPr b="0" sz="1000">
-                          <a:solidFill>
-                            <a:srgbClr val="142A4D"/>
-                          </a:solidFill>
-                        </a:rPr>
-                        <a:t>50.3%</a:t>
-                      </a:r>
-                    </a:p>
-                  </a:txBody>
-                  <a:tcPr/>
-                </a:tc>
-                <a:tc>
-                  <a:txBody>
-                    <a:bodyPr/>
-                    <a:lstStyle/>
-                    <a:p>
-                      <a:r>
-                        <a:rPr b="0" sz="1000">
-                          <a:solidFill>
-                            <a:srgbClr val="142A4D"/>
-                          </a:solidFill>
-                        </a:rPr>
-                        <a:t>77.1%</a:t>
-                      </a:r>
-                    </a:p>
-                  </a:txBody>
-                  <a:tcPr/>
-                </a:tc>
-                <a:tc>
-                  <a:txBody>
-                    <a:bodyPr/>
-                    <a:lstStyle/>
-                    <a:p>
-                      <a:r>
-                        <a:rPr b="0" sz="1000">
-                          <a:solidFill>
-                            <a:srgbClr val="142A4D"/>
-                          </a:solidFill>
-                        </a:rPr>
-                        <a:t>89.7%</a:t>
-                      </a:r>
-                    </a:p>
-                  </a:txBody>
-                  <a:tcPr/>
-                </a:tc>
-                <a:tc>
-                  <a:txBody>
-                    <a:bodyPr/>
-                    <a:lstStyle/>
-                    <a:p>
-                      <a:r>
-                        <a:rPr b="0" sz="1000">
-                          <a:solidFill>
-                            <a:srgbClr val="142A4D"/>
-                          </a:solidFill>
-                        </a:rPr>
-                        <a:t>25.5%</a:t>
-                      </a:r>
-                    </a:p>
-                  </a:txBody>
-                  <a:tcPr/>
-                </a:tc>
-                <a:tc>
-                  <a:txBody>
-                    <a:bodyPr/>
-                    <a:lstStyle/>
-                    <a:p>
-                      <a:r>
-                        <a:rPr b="0" sz="1000">
-                          <a:solidFill>
-                            <a:srgbClr val="142A4D"/>
-                          </a:solidFill>
-                        </a:rPr>
-                        <a:t>3.4%</a:t>
-                      </a:r>
-                    </a:p>
-                  </a:txBody>
-                  <a:tcPr/>
-                </a:tc>
-              </a:tr>
-              <a:tr h="375920">
-                <a:tc>
-                  <a:txBody>
-                    <a:bodyPr/>
-                    <a:lstStyle/>
-                    <a:p>
-                      <a:r>
-                        <a:rPr b="0" sz="1000">
-                          <a:solidFill>
-                            <a:srgbClr val="142A4D"/>
-                          </a:solidFill>
-                        </a:rPr>
-                        <a:t>loveholidays.com</a:t>
-                      </a:r>
-                    </a:p>
-                  </a:txBody>
-                  <a:tcPr/>
-                </a:tc>
-                <a:tc>
-                  <a:txBody>
-                    <a:bodyPr/>
-                    <a:lstStyle/>
-                    <a:p>
-                      <a:r>
-                        <a:rPr b="0" sz="1000">
-                          <a:solidFill>
-                            <a:srgbClr val="142A4D"/>
-                          </a:solidFill>
-                        </a:rPr>
-                        <a:t>45.0%</a:t>
-                      </a:r>
-                    </a:p>
-                  </a:txBody>
-                  <a:tcPr/>
-                </a:tc>
-                <a:tc>
-                  <a:txBody>
-                    <a:bodyPr/>
-                    <a:lstStyle/>
-                    <a:p>
-                      <a:r>
-                        <a:rPr b="0" sz="1000">
-                          <a:solidFill>
-                            <a:srgbClr val="142A4D"/>
-                          </a:solidFill>
-                        </a:rPr>
-                        <a:t>29.9%</a:t>
-                      </a:r>
-                    </a:p>
-                  </a:txBody>
-                  <a:tcPr/>
-                </a:tc>
-                <a:tc>
-                  <a:txBody>
-                    <a:bodyPr/>
-                    <a:lstStyle/>
-                    <a:p>
-                      <a:r>
-                        <a:rPr b="0" sz="1000">
-                          <a:solidFill>
-                            <a:srgbClr val="142A4D"/>
-                          </a:solidFill>
-                        </a:rPr>
-                        <a:t>64.0%</a:t>
-                      </a:r>
-                    </a:p>
-                  </a:txBody>
-                  <a:tcPr/>
-                </a:tc>
-                <a:tc>
-                  <a:txBody>
-                    <a:bodyPr/>
-                    <a:lstStyle/>
-                    <a:p>
-                      <a:r>
-                        <a:rPr b="0" sz="1000">
-                          <a:solidFill>
-                            <a:srgbClr val="142A4D"/>
-                          </a:solidFill>
-                        </a:rPr>
-                        <a:t>85.0%</a:t>
-                      </a:r>
-                    </a:p>
-                  </a:txBody>
-                  <a:tcPr/>
-                </a:tc>
-                <a:tc>
-                  <a:txBody>
-                    <a:bodyPr/>
-                    <a:lstStyle/>
-                    <a:p>
-                      <a:r>
-                        <a:rPr b="0" sz="1000">
-                          <a:solidFill>
-                            <a:srgbClr val="142A4D"/>
-                          </a:solidFill>
-                        </a:rPr>
-                        <a:t>16.9%</a:t>
-                      </a:r>
-                    </a:p>
-                  </a:txBody>
-                  <a:tcPr/>
-                </a:tc>
-                <a:tc>
-                  <a:txBody>
-                    <a:bodyPr/>
-                    <a:lstStyle/>
-                    <a:p>
-                      <a:r>
-                        <a:rPr b="0" sz="1000">
-                          <a:solidFill>
-                            <a:srgbClr val="142A4D"/>
-                          </a:solidFill>
-                        </a:rPr>
-                        <a:t>4.5%</a:t>
+                        <a:rPr b="0" sz="750">
+                          <a:solidFill>
+                            <a:srgbClr val="142A4D"/>
+                          </a:solidFill>
+                        </a:rPr>
+                        <a:t>4.0%</a:t>
+                      </a:r>
+                    </a:p>
+                  </a:txBody>
+                  <a:tcPr/>
+                </a:tc>
+                <a:tc>
+                  <a:txBody>
+                    <a:bodyPr/>
+                    <a:lstStyle/>
+                    <a:p>
+                      <a:r>
+                        <a:rPr b="0" sz="750">
+                          <a:solidFill>
+                            <a:srgbClr val="142A4D"/>
+                          </a:solidFill>
+                        </a:rPr>
+                        <a:t>56.8%</a:t>
+                      </a:r>
+                    </a:p>
+                  </a:txBody>
+                  <a:tcPr/>
+                </a:tc>
+                <a:tc>
+                  <a:txBody>
+                    <a:bodyPr/>
+                    <a:lstStyle/>
+                    <a:p>
+                      <a:r>
+                        <a:rPr b="0" sz="750">
+                          <a:solidFill>
+                            <a:srgbClr val="142A4D"/>
+                          </a:solidFill>
+                        </a:rPr>
+                        <a:t>69.4%</a:t>
+                      </a:r>
+                    </a:p>
+                  </a:txBody>
+                  <a:tcPr/>
+                </a:tc>
+                <a:tc>
+                  <a:txBody>
+                    <a:bodyPr/>
+                    <a:lstStyle/>
+                    <a:p>
+                      <a:r>
+                        <a:rPr b="0" sz="750">
+                          <a:solidFill>
+                            <a:srgbClr val="142A4D"/>
+                          </a:solidFill>
+                        </a:rPr>
+                        <a:t>16.3%</a:t>
+                      </a:r>
+                    </a:p>
+                  </a:txBody>
+                  <a:tcPr/>
+                </a:tc>
+                <a:tc>
+                  <a:txBody>
+                    <a:bodyPr/>
+                    <a:lstStyle/>
+                    <a:p>
+                      <a:r>
+                        <a:rPr b="0" sz="750">
+                          <a:solidFill>
+                            <a:srgbClr val="142A4D"/>
+                          </a:solidFill>
+                        </a:rPr>
+                        <a:t>9.3%</a:t>
                       </a:r>
                     </a:p>
                   </a:txBody>
@@ -4693,7 +5917,7 @@
               </a:defRPr>
             </a:pPr>
             <a:r>
-              <a:t>jet2holidays.com had the highest impression share at 64.1%.</a:t>
+              <a:t>The uploaded auction report included 12 competitor row(s).</a:t>
             </a:r>
           </a:p>
           <a:p>
@@ -4708,7 +5932,7 @@
               </a:defRPr>
             </a:pPr>
             <a:r>
-              <a:t>jet2holidays.com had the highest overlap rate at 56.5%.</a:t>
+              <a:t>Our own row was present without a usable impression-share value, so competitor pressure is read from the surrounding auction metrics.</a:t>
             </a:r>
           </a:p>
           <a:p>
@@ -4723,7 +5947,67 @@
               </a:defRPr>
             </a:pPr>
             <a:r>
-              <a:t>The average top of page rate across competitors was 80.4%.</a:t>
+              <a:t>jet2holidays.com had the highest impression share at 57.3%.</a:t>
+            </a:r>
+          </a:p>
+          <a:p>
+            <a:pPr>
+              <a:spcAft>
+                <a:spcPts val="1000"/>
+              </a:spcAft>
+              <a:defRPr sz="1300">
+                <a:solidFill>
+                  <a:srgbClr val="2D2D2D"/>
+                </a:solidFill>
+              </a:defRPr>
+            </a:pPr>
+            <a:r>
+              <a:t>jet2holidays.com had the highest overlap rate at 35.5%.</a:t>
+            </a:r>
+          </a:p>
+          <a:p>
+            <a:pPr>
+              <a:spcAft>
+                <a:spcPts val="1000"/>
+              </a:spcAft>
+              <a:defRPr sz="1300">
+                <a:solidFill>
+                  <a:srgbClr val="2D2D2D"/>
+                </a:solidFill>
+              </a:defRPr>
+            </a:pPr>
+            <a:r>
+              <a:t>jet2holidays.com had the highest position-above rate at 83.6%.</a:t>
+            </a:r>
+          </a:p>
+          <a:p>
+            <a:pPr>
+              <a:spcAft>
+                <a:spcPts val="1000"/>
+              </a:spcAft>
+              <a:defRPr sz="1300">
+                <a:solidFill>
+                  <a:srgbClr val="2D2D2D"/>
+                </a:solidFill>
+              </a:defRPr>
+            </a:pPr>
+            <a:r>
+              <a:t>jet2holidays.com had the highest absolute top-of-page rate at 52.1%.</a:t>
+            </a:r>
+          </a:p>
+          <a:p>
+            <a:pPr>
+              <a:spcAft>
+                <a:spcPts val="1000"/>
+              </a:spcAft>
+              <a:defRPr sz="1300">
+                <a:solidFill>
+                  <a:srgbClr val="2D2D2D"/>
+                </a:solidFill>
+              </a:defRPr>
+            </a:pPr>
+            <a:r>
+              <a:t>Average top-of-page pressure across competitors was 69.2%.</a:t>
             </a:r>
           </a:p>
         </p:txBody>
@@ -4736,7 +6020,7 @@
 </p:sld>
 </file>
 
-<file path=ppt/slides/slide4.xml><?xml version="1.0" encoding="utf-8"?>
+<file path=ppt/slides/slide6.xml><?xml version="1.0" encoding="utf-8"?>
 <p:sld xmlns:a="http://schemas.openxmlformats.org/drawingml/2006/main" xmlns:p="http://schemas.openxmlformats.org/presentationml/2006/main" xmlns:r="http://schemas.openxmlformats.org/officeDocument/2006/relationships">
   <p:cSld>
     <p:bg>
@@ -4877,7 +6161,7 @@
               </a:defRPr>
             </a:pPr>
             <a:r>
-              <a:t>Revenue fell 77.9% from Jan 2026 to Mar 2026.</a:t>
+              <a:t>Revenue moved -58.6% from Jan 2026 to Mar 2026.</a:t>
             </a:r>
           </a:p>
           <a:p>
@@ -4892,7 +6176,7 @@
               </a:defRPr>
             </a:pPr>
             <a:r>
-              <a:t>CPA worsened 86.6% over the same period, linking spend to lower output efficiency.</a:t>
+              <a:t>Spend moved -35.0% over the same period, while purchases moved -57.9%.</a:t>
             </a:r>
           </a:p>
           <a:p>
@@ -4907,7 +6191,7 @@
               </a:defRPr>
             </a:pPr>
             <a:r>
-              <a:t>Spend decreased 57.1%, helping explain the gap between investment and returned revenue.</a:t>
+              <a:t>CPA moved +54.3%, and AOV closed the quarter at £1,782.</a:t>
             </a:r>
           </a:p>
           <a:p>
@@ -4922,7 +6206,7 @@
               </a:defRPr>
             </a:pPr>
             <a:r>
-              <a:t>YoY matched-month revenue moved -59.9% while CPA moved 74.9%.</a:t>
+              <a:t>Add-to-cart volume reached 2331.2, with quarter cost per ATC at £31.</a:t>
             </a:r>
           </a:p>
         </p:txBody>
@@ -4935,7 +6219,786 @@
 </p:sld>
 </file>
 
-<file path=ppt/slides/slide5.xml><?xml version="1.0" encoding="utf-8"?>
+<file path=ppt/slides/slide7.xml><?xml version="1.0" encoding="utf-8"?>
+<p:sld xmlns:a="http://schemas.openxmlformats.org/drawingml/2006/main" xmlns:p="http://schemas.openxmlformats.org/presentationml/2006/main" xmlns:r="http://schemas.openxmlformats.org/officeDocument/2006/relationships">
+  <p:cSld>
+    <p:bg>
+      <p:bgPr>
+        <a:solidFill>
+          <a:srgbClr val="F7F9FC"/>
+        </a:solidFill>
+        <a:effectLst/>
+      </p:bgPr>
+    </p:bg>
+    <p:spTree>
+      <p:nvGrpSpPr>
+        <p:cNvPr id="1" name=""/>
+        <p:cNvGrpSpPr/>
+        <p:nvPr/>
+      </p:nvGrpSpPr>
+      <p:grpSpPr/>
+      <p:sp>
+        <p:nvSpPr>
+          <p:cNvPr id="2" name="TextBox 1"/>
+          <p:cNvSpPr txBox="1"/>
+          <p:nvPr/>
+        </p:nvSpPr>
+        <p:spPr>
+          <a:xfrm>
+            <a:off x="548640" y="256032"/>
+            <a:ext cx="10972800" cy="548640"/>
+          </a:xfrm>
+          <a:prstGeom prst="rect">
+            <a:avLst/>
+          </a:prstGeom>
+          <a:noFill/>
+        </p:spPr>
+        <p:txBody>
+          <a:bodyPr wrap="none">
+            <a:spAutoFit/>
+          </a:bodyPr>
+          <a:lstStyle/>
+          <a:p>
+            <a:r>
+              <a:rPr sz="2400" b="1">
+                <a:solidFill>
+                  <a:srgbClr val="142A4D"/>
+                </a:solidFill>
+              </a:rPr>
+              <a:t>YoY Matched-Month Comparison</a:t>
+            </a:r>
+          </a:p>
+        </p:txBody>
+      </p:sp>
+      <p:sp>
+        <p:nvSpPr>
+          <p:cNvPr id="3" name="TextBox 2"/>
+          <p:cNvSpPr txBox="1"/>
+          <p:nvPr/>
+        </p:nvSpPr>
+        <p:spPr>
+          <a:xfrm>
+            <a:off x="548640" y="822960"/>
+            <a:ext cx="10972800" cy="274320"/>
+          </a:xfrm>
+          <a:prstGeom prst="rect">
+            <a:avLst/>
+          </a:prstGeom>
+          <a:noFill/>
+        </p:spPr>
+        <p:txBody>
+          <a:bodyPr wrap="none">
+            <a:spAutoFit/>
+          </a:bodyPr>
+          <a:lstStyle/>
+          <a:p>
+            <a:r>
+              <a:rPr sz="1200">
+                <a:solidFill>
+                  <a:srgbClr val="5A5A5A"/>
+                </a:solidFill>
+              </a:rPr>
+              <a:t>Matched months versus prior-year quarter (2 of 3 months matched)</a:t>
+            </a:r>
+          </a:p>
+        </p:txBody>
+      </p:sp>
+      <p:graphicFrame>
+        <p:nvGraphicFramePr>
+          <p:cNvPr id="4" name="Table 3"/>
+          <p:cNvGraphicFramePr>
+            <a:graphicFrameLocks noGrp="1"/>
+          </p:cNvGraphicFramePr>
+          <p:nvPr/>
+        </p:nvGraphicFramePr>
+        <p:xfrm>
+          <a:off x="411480" y="1234440"/>
+          <a:ext cx="7498079" cy="3383280"/>
+        </p:xfrm>
+        <a:graphic>
+          <a:graphicData uri="http://schemas.openxmlformats.org/drawingml/2006/table">
+            <a:tbl>
+              <a:tblPr firstRow="1" bandRow="1">
+                <a:tableStyleId>{5C22544A-7EE6-4342-B048-85BDC9FD1C3A}</a:tableStyleId>
+              </a:tblPr>
+              <a:tblGrid>
+                <a:gridCol w="1874519"/>
+                <a:gridCol w="1874519"/>
+                <a:gridCol w="1874519"/>
+                <a:gridCol w="1874522"/>
+              </a:tblGrid>
+              <a:tr h="422910">
+                <a:tc>
+                  <a:txBody>
+                    <a:bodyPr/>
+                    <a:lstStyle/>
+                    <a:p>
+                      <a:r>
+                        <a:rPr b="1" sz="900">
+                          <a:solidFill>
+                            <a:srgbClr val="142A4D"/>
+                          </a:solidFill>
+                        </a:rPr>
+                        <a:t>Metric</a:t>
+                      </a:r>
+                    </a:p>
+                  </a:txBody>
+                  <a:tcPr>
+                    <a:solidFill>
+                      <a:srgbClr val="DBE6F4"/>
+                    </a:solidFill>
+                  </a:tcPr>
+                </a:tc>
+                <a:tc>
+                  <a:txBody>
+                    <a:bodyPr/>
+                    <a:lstStyle/>
+                    <a:p>
+                      <a:r>
+                        <a:rPr b="1" sz="900">
+                          <a:solidFill>
+                            <a:srgbClr val="142A4D"/>
+                          </a:solidFill>
+                        </a:rPr>
+                        <a:t>Q1 2025</a:t>
+                      </a:r>
+                    </a:p>
+                  </a:txBody>
+                  <a:tcPr>
+                    <a:solidFill>
+                      <a:srgbClr val="DBE6F4"/>
+                    </a:solidFill>
+                  </a:tcPr>
+                </a:tc>
+                <a:tc>
+                  <a:txBody>
+                    <a:bodyPr/>
+                    <a:lstStyle/>
+                    <a:p>
+                      <a:r>
+                        <a:rPr b="1" sz="900">
+                          <a:solidFill>
+                            <a:srgbClr val="142A4D"/>
+                          </a:solidFill>
+                        </a:rPr>
+                        <a:t>Q1 2026</a:t>
+                      </a:r>
+                    </a:p>
+                  </a:txBody>
+                  <a:tcPr>
+                    <a:solidFill>
+                      <a:srgbClr val="DBE6F4"/>
+                    </a:solidFill>
+                  </a:tcPr>
+                </a:tc>
+                <a:tc>
+                  <a:txBody>
+                    <a:bodyPr/>
+                    <a:lstStyle/>
+                    <a:p>
+                      <a:r>
+                        <a:rPr b="1" sz="900">
+                          <a:solidFill>
+                            <a:srgbClr val="142A4D"/>
+                          </a:solidFill>
+                        </a:rPr>
+                        <a:t>Change</a:t>
+                      </a:r>
+                    </a:p>
+                  </a:txBody>
+                  <a:tcPr>
+                    <a:solidFill>
+                      <a:srgbClr val="DBE6F4"/>
+                    </a:solidFill>
+                  </a:tcPr>
+                </a:tc>
+              </a:tr>
+              <a:tr h="422910">
+                <a:tc>
+                  <a:txBody>
+                    <a:bodyPr/>
+                    <a:lstStyle/>
+                    <a:p>
+                      <a:r>
+                        <a:rPr b="0" sz="900">
+                          <a:solidFill>
+                            <a:srgbClr val="142A4D"/>
+                          </a:solidFill>
+                        </a:rPr>
+                        <a:t>Revenue</a:t>
+                      </a:r>
+                    </a:p>
+                  </a:txBody>
+                  <a:tcPr/>
+                </a:tc>
+                <a:tc>
+                  <a:txBody>
+                    <a:bodyPr/>
+                    <a:lstStyle/>
+                    <a:p>
+                      <a:r>
+                        <a:rPr b="0" sz="900">
+                          <a:solidFill>
+                            <a:srgbClr val="142A4D"/>
+                          </a:solidFill>
+                        </a:rPr>
+                        <a:t>£316,901</a:t>
+                      </a:r>
+                    </a:p>
+                  </a:txBody>
+                  <a:tcPr/>
+                </a:tc>
+                <a:tc>
+                  <a:txBody>
+                    <a:bodyPr/>
+                    <a:lstStyle/>
+                    <a:p>
+                      <a:r>
+                        <a:rPr b="0" sz="900">
+                          <a:solidFill>
+                            <a:srgbClr val="142A4D"/>
+                          </a:solidFill>
+                        </a:rPr>
+                        <a:t>£166,853</a:t>
+                      </a:r>
+                    </a:p>
+                  </a:txBody>
+                  <a:tcPr/>
+                </a:tc>
+                <a:tc>
+                  <a:txBody>
+                    <a:bodyPr/>
+                    <a:lstStyle/>
+                    <a:p>
+                      <a:r>
+                        <a:rPr b="0" sz="900">
+                          <a:solidFill>
+                            <a:srgbClr val="142A4D"/>
+                          </a:solidFill>
+                        </a:rPr>
+                        <a:t>-47.3%</a:t>
+                      </a:r>
+                    </a:p>
+                  </a:txBody>
+                  <a:tcPr/>
+                </a:tc>
+              </a:tr>
+              <a:tr h="422910">
+                <a:tc>
+                  <a:txBody>
+                    <a:bodyPr/>
+                    <a:lstStyle/>
+                    <a:p>
+                      <a:r>
+                        <a:rPr b="0" sz="900">
+                          <a:solidFill>
+                            <a:srgbClr val="142A4D"/>
+                          </a:solidFill>
+                        </a:rPr>
+                        <a:t>Cost</a:t>
+                      </a:r>
+                    </a:p>
+                  </a:txBody>
+                  <a:tcPr/>
+                </a:tc>
+                <a:tc>
+                  <a:txBody>
+                    <a:bodyPr/>
+                    <a:lstStyle/>
+                    <a:p>
+                      <a:r>
+                        <a:rPr b="0" sz="900">
+                          <a:solidFill>
+                            <a:srgbClr val="142A4D"/>
+                          </a:solidFill>
+                        </a:rPr>
+                        <a:t>£51,548</a:t>
+                      </a:r>
+                    </a:p>
+                  </a:txBody>
+                  <a:tcPr/>
+                </a:tc>
+                <a:tc>
+                  <a:txBody>
+                    <a:bodyPr/>
+                    <a:lstStyle/>
+                    <a:p>
+                      <a:r>
+                        <a:rPr b="0" sz="900">
+                          <a:solidFill>
+                            <a:srgbClr val="142A4D"/>
+                          </a:solidFill>
+                        </a:rPr>
+                        <a:t>£45,109</a:t>
+                      </a:r>
+                    </a:p>
+                  </a:txBody>
+                  <a:tcPr/>
+                </a:tc>
+                <a:tc>
+                  <a:txBody>
+                    <a:bodyPr/>
+                    <a:lstStyle/>
+                    <a:p>
+                      <a:r>
+                        <a:rPr b="0" sz="900">
+                          <a:solidFill>
+                            <a:srgbClr val="142A4D"/>
+                          </a:solidFill>
+                        </a:rPr>
+                        <a:t>-12.5%</a:t>
+                      </a:r>
+                    </a:p>
+                  </a:txBody>
+                  <a:tcPr/>
+                </a:tc>
+              </a:tr>
+              <a:tr h="422910">
+                <a:tc>
+                  <a:txBody>
+                    <a:bodyPr/>
+                    <a:lstStyle/>
+                    <a:p>
+                      <a:r>
+                        <a:rPr b="0" sz="900">
+                          <a:solidFill>
+                            <a:srgbClr val="142A4D"/>
+                          </a:solidFill>
+                        </a:rPr>
+                        <a:t>Purchases</a:t>
+                      </a:r>
+                    </a:p>
+                  </a:txBody>
+                  <a:tcPr/>
+                </a:tc>
+                <a:tc>
+                  <a:txBody>
+                    <a:bodyPr/>
+                    <a:lstStyle/>
+                    <a:p>
+                      <a:r>
+                        <a:rPr b="0" sz="900">
+                          <a:solidFill>
+                            <a:srgbClr val="142A4D"/>
+                          </a:solidFill>
+                        </a:rPr>
+                        <a:t>165.6</a:t>
+                      </a:r>
+                    </a:p>
+                  </a:txBody>
+                  <a:tcPr/>
+                </a:tc>
+                <a:tc>
+                  <a:txBody>
+                    <a:bodyPr/>
+                    <a:lstStyle/>
+                    <a:p>
+                      <a:r>
+                        <a:rPr b="0" sz="900">
+                          <a:solidFill>
+                            <a:srgbClr val="142A4D"/>
+                          </a:solidFill>
+                        </a:rPr>
+                        <a:t>93.8</a:t>
+                      </a:r>
+                    </a:p>
+                  </a:txBody>
+                  <a:tcPr/>
+                </a:tc>
+                <a:tc>
+                  <a:txBody>
+                    <a:bodyPr/>
+                    <a:lstStyle/>
+                    <a:p>
+                      <a:r>
+                        <a:rPr b="0" sz="900">
+                          <a:solidFill>
+                            <a:srgbClr val="142A4D"/>
+                          </a:solidFill>
+                        </a:rPr>
+                        <a:t>-43.4%</a:t>
+                      </a:r>
+                    </a:p>
+                  </a:txBody>
+                  <a:tcPr/>
+                </a:tc>
+              </a:tr>
+              <a:tr h="422910">
+                <a:tc>
+                  <a:txBody>
+                    <a:bodyPr/>
+                    <a:lstStyle/>
+                    <a:p>
+                      <a:r>
+                        <a:rPr b="0" sz="900">
+                          <a:solidFill>
+                            <a:srgbClr val="142A4D"/>
+                          </a:solidFill>
+                        </a:rPr>
+                        <a:t>Add to Cart</a:t>
+                      </a:r>
+                    </a:p>
+                  </a:txBody>
+                  <a:tcPr/>
+                </a:tc>
+                <a:tc>
+                  <a:txBody>
+                    <a:bodyPr/>
+                    <a:lstStyle/>
+                    <a:p>
+                      <a:r>
+                        <a:rPr b="0" sz="900">
+                          <a:solidFill>
+                            <a:srgbClr val="142A4D"/>
+                          </a:solidFill>
+                        </a:rPr>
+                        <a:t>2567.7</a:t>
+                      </a:r>
+                    </a:p>
+                  </a:txBody>
+                  <a:tcPr/>
+                </a:tc>
+                <a:tc>
+                  <a:txBody>
+                    <a:bodyPr/>
+                    <a:lstStyle/>
+                    <a:p>
+                      <a:r>
+                        <a:rPr b="0" sz="900">
+                          <a:solidFill>
+                            <a:srgbClr val="142A4D"/>
+                          </a:solidFill>
+                        </a:rPr>
+                        <a:t>1155.1</a:t>
+                      </a:r>
+                    </a:p>
+                  </a:txBody>
+                  <a:tcPr/>
+                </a:tc>
+                <a:tc>
+                  <a:txBody>
+                    <a:bodyPr/>
+                    <a:lstStyle/>
+                    <a:p>
+                      <a:r>
+                        <a:rPr b="0" sz="900">
+                          <a:solidFill>
+                            <a:srgbClr val="142A4D"/>
+                          </a:solidFill>
+                        </a:rPr>
+                        <a:t>-55.0%</a:t>
+                      </a:r>
+                    </a:p>
+                  </a:txBody>
+                  <a:tcPr/>
+                </a:tc>
+              </a:tr>
+              <a:tr h="422910">
+                <a:tc>
+                  <a:txBody>
+                    <a:bodyPr/>
+                    <a:lstStyle/>
+                    <a:p>
+                      <a:r>
+                        <a:rPr b="0" sz="900">
+                          <a:solidFill>
+                            <a:srgbClr val="142A4D"/>
+                          </a:solidFill>
+                        </a:rPr>
+                        <a:t>CPA</a:t>
+                      </a:r>
+                    </a:p>
+                  </a:txBody>
+                  <a:tcPr/>
+                </a:tc>
+                <a:tc>
+                  <a:txBody>
+                    <a:bodyPr/>
+                    <a:lstStyle/>
+                    <a:p>
+                      <a:r>
+                        <a:rPr b="0" sz="900">
+                          <a:solidFill>
+                            <a:srgbClr val="142A4D"/>
+                          </a:solidFill>
+                        </a:rPr>
+                        <a:t>£311</a:t>
+                      </a:r>
+                    </a:p>
+                  </a:txBody>
+                  <a:tcPr/>
+                </a:tc>
+                <a:tc>
+                  <a:txBody>
+                    <a:bodyPr/>
+                    <a:lstStyle/>
+                    <a:p>
+                      <a:r>
+                        <a:rPr b="0" sz="900">
+                          <a:solidFill>
+                            <a:srgbClr val="142A4D"/>
+                          </a:solidFill>
+                        </a:rPr>
+                        <a:t>£481</a:t>
+                      </a:r>
+                    </a:p>
+                  </a:txBody>
+                  <a:tcPr/>
+                </a:tc>
+                <a:tc>
+                  <a:txBody>
+                    <a:bodyPr/>
+                    <a:lstStyle/>
+                    <a:p>
+                      <a:r>
+                        <a:rPr b="0" sz="900">
+                          <a:solidFill>
+                            <a:srgbClr val="142A4D"/>
+                          </a:solidFill>
+                        </a:rPr>
+                        <a:t>+54.5%</a:t>
+                      </a:r>
+                    </a:p>
+                  </a:txBody>
+                  <a:tcPr/>
+                </a:tc>
+              </a:tr>
+              <a:tr h="422910">
+                <a:tc>
+                  <a:txBody>
+                    <a:bodyPr/>
+                    <a:lstStyle/>
+                    <a:p>
+                      <a:r>
+                        <a:rPr b="0" sz="900">
+                          <a:solidFill>
+                            <a:srgbClr val="142A4D"/>
+                          </a:solidFill>
+                        </a:rPr>
+                        <a:t>Cost per ATC</a:t>
+                      </a:r>
+                    </a:p>
+                  </a:txBody>
+                  <a:tcPr/>
+                </a:tc>
+                <a:tc>
+                  <a:txBody>
+                    <a:bodyPr/>
+                    <a:lstStyle/>
+                    <a:p>
+                      <a:r>
+                        <a:rPr b="0" sz="900">
+                          <a:solidFill>
+                            <a:srgbClr val="142A4D"/>
+                          </a:solidFill>
+                        </a:rPr>
+                        <a:t>£20</a:t>
+                      </a:r>
+                    </a:p>
+                  </a:txBody>
+                  <a:tcPr/>
+                </a:tc>
+                <a:tc>
+                  <a:txBody>
+                    <a:bodyPr/>
+                    <a:lstStyle/>
+                    <a:p>
+                      <a:r>
+                        <a:rPr b="0" sz="900">
+                          <a:solidFill>
+                            <a:srgbClr val="142A4D"/>
+                          </a:solidFill>
+                        </a:rPr>
+                        <a:t>£39</a:t>
+                      </a:r>
+                    </a:p>
+                  </a:txBody>
+                  <a:tcPr/>
+                </a:tc>
+                <a:tc>
+                  <a:txBody>
+                    <a:bodyPr/>
+                    <a:lstStyle/>
+                    <a:p>
+                      <a:r>
+                        <a:rPr b="0" sz="900">
+                          <a:solidFill>
+                            <a:srgbClr val="142A4D"/>
+                          </a:solidFill>
+                        </a:rPr>
+                        <a:t>+94.5%</a:t>
+                      </a:r>
+                    </a:p>
+                  </a:txBody>
+                  <a:tcPr/>
+                </a:tc>
+              </a:tr>
+              <a:tr h="422910">
+                <a:tc>
+                  <a:txBody>
+                    <a:bodyPr/>
+                    <a:lstStyle/>
+                    <a:p>
+                      <a:r>
+                        <a:rPr b="0" sz="900">
+                          <a:solidFill>
+                            <a:srgbClr val="142A4D"/>
+                          </a:solidFill>
+                        </a:rPr>
+                        <a:t>AOV</a:t>
+                      </a:r>
+                    </a:p>
+                  </a:txBody>
+                  <a:tcPr/>
+                </a:tc>
+                <a:tc>
+                  <a:txBody>
+                    <a:bodyPr/>
+                    <a:lstStyle/>
+                    <a:p>
+                      <a:r>
+                        <a:rPr b="0" sz="900">
+                          <a:solidFill>
+                            <a:srgbClr val="142A4D"/>
+                          </a:solidFill>
+                        </a:rPr>
+                        <a:t>£1,913</a:t>
+                      </a:r>
+                    </a:p>
+                  </a:txBody>
+                  <a:tcPr/>
+                </a:tc>
+                <a:tc>
+                  <a:txBody>
+                    <a:bodyPr/>
+                    <a:lstStyle/>
+                    <a:p>
+                      <a:r>
+                        <a:rPr b="0" sz="900">
+                          <a:solidFill>
+                            <a:srgbClr val="142A4D"/>
+                          </a:solidFill>
+                        </a:rPr>
+                        <a:t>£1,778</a:t>
+                      </a:r>
+                    </a:p>
+                  </a:txBody>
+                  <a:tcPr/>
+                </a:tc>
+                <a:tc>
+                  <a:txBody>
+                    <a:bodyPr/>
+                    <a:lstStyle/>
+                    <a:p>
+                      <a:r>
+                        <a:rPr b="0" sz="900">
+                          <a:solidFill>
+                            <a:srgbClr val="142A4D"/>
+                          </a:solidFill>
+                        </a:rPr>
+                        <a:t>-7.0%</a:t>
+                      </a:r>
+                    </a:p>
+                  </a:txBody>
+                  <a:tcPr/>
+                </a:tc>
+              </a:tr>
+            </a:tbl>
+          </a:graphicData>
+        </a:graphic>
+      </p:graphicFrame>
+      <p:sp>
+        <p:nvSpPr>
+          <p:cNvPr id="5" name="TextBox 4"/>
+          <p:cNvSpPr txBox="1"/>
+          <p:nvPr/>
+        </p:nvSpPr>
+        <p:spPr>
+          <a:xfrm>
+            <a:off x="8183879" y="1325880"/>
+            <a:ext cx="2971800" cy="4206240"/>
+          </a:xfrm>
+          <a:prstGeom prst="rect">
+            <a:avLst/>
+          </a:prstGeom>
+          <a:noFill/>
+        </p:spPr>
+        <p:txBody>
+          <a:bodyPr wrap="none">
+            <a:spAutoFit/>
+          </a:bodyPr>
+          <a:lstStyle/>
+          <a:p>
+            <a:pPr>
+              <a:spcAft>
+                <a:spcPts val="1000"/>
+              </a:spcAft>
+              <a:defRPr sz="1300">
+                <a:solidFill>
+                  <a:srgbClr val="2D2D2D"/>
+                </a:solidFill>
+              </a:defRPr>
+            </a:pPr>
+            <a:r>
+              <a:t>The comparison covers 2 of 3 month(s) in the quarter.</a:t>
+            </a:r>
+          </a:p>
+          <a:p>
+            <a:pPr>
+              <a:spcAft>
+                <a:spcPts val="1000"/>
+              </a:spcAft>
+              <a:defRPr sz="1300">
+                <a:solidFill>
+                  <a:srgbClr val="2D2D2D"/>
+                </a:solidFill>
+              </a:defRPr>
+            </a:pPr>
+            <a:r>
+              <a:t>Revenue was -47.3% versus Q1 2025.</a:t>
+            </a:r>
+          </a:p>
+          <a:p>
+            <a:pPr>
+              <a:spcAft>
+                <a:spcPts val="1000"/>
+              </a:spcAft>
+              <a:defRPr sz="1300">
+                <a:solidFill>
+                  <a:srgbClr val="2D2D2D"/>
+                </a:solidFill>
+              </a:defRPr>
+            </a:pPr>
+            <a:r>
+              <a:t>Spend was -12.5% and purchases were -43.4% on matched months.</a:t>
+            </a:r>
+          </a:p>
+          <a:p>
+            <a:pPr>
+              <a:spcAft>
+                <a:spcPts val="1000"/>
+              </a:spcAft>
+              <a:defRPr sz="1300">
+                <a:solidFill>
+                  <a:srgbClr val="2D2D2D"/>
+                </a:solidFill>
+              </a:defRPr>
+            </a:pPr>
+            <a:r>
+              <a:t>CPA moved +54.5%, cost per ATC moved +94.5%, and AOV moved -7.0%.</a:t>
+            </a:r>
+          </a:p>
+        </p:txBody>
+      </p:sp>
+    </p:spTree>
+  </p:cSld>
+  <p:clrMapOvr>
+    <a:masterClrMapping/>
+  </p:clrMapOvr>
+</p:sld>
+</file>
+
+<file path=ppt/slides/slide8.xml><?xml version="1.0" encoding="utf-8"?>
 <p:sld xmlns:a="http://schemas.openxmlformats.org/drawingml/2006/main" xmlns:p="http://schemas.openxmlformats.org/presentationml/2006/main" xmlns:r="http://schemas.openxmlformats.org/officeDocument/2006/relationships">
   <p:cSld>
     <p:bg>
@@ -5076,7 +7139,7 @@
               </a:defRPr>
             </a:pPr>
             <a:r>
-              <a:t>Mar 2026 revenue was £45,555, versus £81,535 in Feb 2026.</a:t>
+              <a:t>Mar 2026 revenue was £85,318 versus £81,535 in Feb 2026.</a:t>
             </a:r>
           </a:p>
           <a:p>
@@ -5091,7 +7154,7 @@
               </a:defRPr>
             </a:pPr>
             <a:r>
-              <a:t>CPA fell from £604 to £442 across the closing months.</a:t>
+              <a:t>Spend moved from £27,342 to £17,767, while purchases moved from 45.3 to 48.6.</a:t>
             </a:r>
           </a:p>
           <a:p>
@@ -5106,7 +7169,22 @@
               </a:defRPr>
             </a:pPr>
             <a:r>
-              <a:t>Purchases moved from 45.3 to 26.6 over the same period.</a:t>
+              <a:t>CPA improved from £604 to £366.</a:t>
+            </a:r>
+          </a:p>
+          <a:p>
+            <a:pPr>
+              <a:spcAft>
+                <a:spcPts val="1000"/>
+              </a:spcAft>
+              <a:defRPr sz="1300">
+                <a:solidFill>
+                  <a:srgbClr val="2D2D2D"/>
+                </a:solidFill>
+              </a:defRPr>
+            </a:pPr>
+            <a:r>
+              <a:t>Cost per ATC moved from £41 to £37.</a:t>
             </a:r>
           </a:p>
         </p:txBody>
@@ -5119,7 +7197,7 @@
 </p:sld>
 </file>
 
-<file path=ppt/slides/slide6.xml><?xml version="1.0" encoding="utf-8"?>
+<file path=ppt/slides/slide9.xml><?xml version="1.0" encoding="utf-8"?>
 <p:sld xmlns:a="http://schemas.openxmlformats.org/drawingml/2006/main" xmlns:p="http://schemas.openxmlformats.org/presentationml/2006/main" xmlns:r="http://schemas.openxmlformats.org/officeDocument/2006/relationships">
   <p:cSld>
     <p:bg>
@@ -5284,7 +7362,7 @@
               </a:defRPr>
             </a:pPr>
             <a:r>
-              <a:t>Brand is the strongest channel, delivering 67.9% of revenue at £75 CPA.</a:t>
+              <a:t>Brand drove the largest revenue share at 69.1% with £79 CPA.</a:t>
             </a:r>
           </a:p>
           <a:p>
@@ -5299,7 +7377,7 @@
               </a:defRPr>
             </a:pPr>
             <a:r>
-              <a:t>Generic is the weakest budget allocation, taking 69.2% of cost while running at £1,049 CPA.</a:t>
+              <a:t>Generic carried the highest cost share at 68.5% of spend.</a:t>
             </a:r>
           </a:p>
           <a:p>
@@ -5314,7 +7392,7 @@
               </a:defRPr>
             </a:pPr>
             <a:r>
-              <a:t>Generic carries the largest cost share at 69.2%, so budget discipline there has the biggest account impact.</a:t>
+              <a:t>Generic was the least efficient campaign type on quarter CPA at £1,036.</a:t>
             </a:r>
           </a:p>
           <a:p>
@@ -5329,206 +7407,7 @@
               </a:defRPr>
             </a:pPr>
             <a:r>
-              <a:t>Budget efficiency is strongest where revenue share materially exceeds cost share, and weakest where cost concentration is not matched by returns.</a:t>
-            </a:r>
-          </a:p>
-        </p:txBody>
-      </p:sp>
-    </p:spTree>
-  </p:cSld>
-  <p:clrMapOvr>
-    <a:masterClrMapping/>
-  </p:clrMapOvr>
-</p:sld>
-</file>
-
-<file path=ppt/slides/slide7.xml><?xml version="1.0" encoding="utf-8"?>
-<p:sld xmlns:a="http://schemas.openxmlformats.org/drawingml/2006/main" xmlns:p="http://schemas.openxmlformats.org/presentationml/2006/main" xmlns:r="http://schemas.openxmlformats.org/officeDocument/2006/relationships">
-  <p:cSld>
-    <p:bg>
-      <p:bgPr>
-        <a:solidFill>
-          <a:srgbClr val="F7F9FC"/>
-        </a:solidFill>
-        <a:effectLst/>
-      </p:bgPr>
-    </p:bg>
-    <p:spTree>
-      <p:nvGrpSpPr>
-        <p:cNvPr id="1" name=""/>
-        <p:cNvGrpSpPr/>
-        <p:nvPr/>
-      </p:nvGrpSpPr>
-      <p:grpSpPr/>
-      <p:sp>
-        <p:nvSpPr>
-          <p:cNvPr id="2" name="TextBox 1"/>
-          <p:cNvSpPr txBox="1"/>
-          <p:nvPr/>
-        </p:nvSpPr>
-        <p:spPr>
-          <a:xfrm>
-            <a:off x="548640" y="256032"/>
-            <a:ext cx="10972800" cy="548640"/>
-          </a:xfrm>
-          <a:prstGeom prst="rect">
-            <a:avLst/>
-          </a:prstGeom>
-          <a:noFill/>
-        </p:spPr>
-        <p:txBody>
-          <a:bodyPr wrap="none">
-            <a:spAutoFit/>
-          </a:bodyPr>
-          <a:lstStyle/>
-          <a:p>
-            <a:r>
-              <a:rPr sz="2400" b="1">
-                <a:solidFill>
-                  <a:srgbClr val="142A4D"/>
-                </a:solidFill>
-              </a:rPr>
-              <a:t>ATC Analysis</a:t>
-            </a:r>
-          </a:p>
-        </p:txBody>
-      </p:sp>
-      <p:sp>
-        <p:nvSpPr>
-          <p:cNvPr id="3" name="TextBox 2"/>
-          <p:cNvSpPr txBox="1"/>
-          <p:nvPr/>
-        </p:nvSpPr>
-        <p:spPr>
-          <a:xfrm>
-            <a:off x="548640" y="822960"/>
-            <a:ext cx="10972800" cy="274320"/>
-          </a:xfrm>
-          <a:prstGeom prst="rect">
-            <a:avLst/>
-          </a:prstGeom>
-          <a:noFill/>
-        </p:spPr>
-        <p:txBody>
-          <a:bodyPr wrap="none">
-            <a:spAutoFit/>
-          </a:bodyPr>
-          <a:lstStyle/>
-          <a:p>
-            <a:r>
-              <a:rPr sz="1200">
-                <a:solidFill>
-                  <a:srgbClr val="5A5A5A"/>
-                </a:solidFill>
-              </a:rPr>
-              <a:t>Add to cart and CPATC</a:t>
-            </a:r>
-          </a:p>
-        </p:txBody>
-      </p:sp>
-      <p:pic>
-        <p:nvPicPr>
-          <p:cNvPr id="4" name="Picture 3" descr="atc_analysis.png"/>
-          <p:cNvPicPr>
-            <a:picLocks noChangeAspect="1"/>
-          </p:cNvPicPr>
-          <p:nvPr/>
-        </p:nvPicPr>
-        <p:blipFill>
-          <a:blip r:embed="rId2"/>
-          <a:stretch>
-            <a:fillRect/>
-          </a:stretch>
-        </p:blipFill>
-        <p:spPr>
-          <a:xfrm>
-            <a:off x="548640" y="1188720"/>
-            <a:ext cx="6583680" cy="4389120"/>
-          </a:xfrm>
-          <a:prstGeom prst="rect">
-            <a:avLst/>
-          </a:prstGeom>
-        </p:spPr>
-      </p:pic>
-      <p:sp>
-        <p:nvSpPr>
-          <p:cNvPr id="5" name="TextBox 4"/>
-          <p:cNvSpPr txBox="1"/>
-          <p:nvPr/>
-        </p:nvSpPr>
-        <p:spPr>
-          <a:xfrm>
-            <a:off x="7452360" y="1325880"/>
-            <a:ext cx="3840480" cy="4389120"/>
-          </a:xfrm>
-          <a:prstGeom prst="rect">
-            <a:avLst/>
-          </a:prstGeom>
-          <a:noFill/>
-        </p:spPr>
-        <p:txBody>
-          <a:bodyPr wrap="none">
-            <a:spAutoFit/>
-          </a:bodyPr>
-          <a:lstStyle/>
-          <a:p>
-            <a:pPr>
-              <a:spcAft>
-                <a:spcPts val="1000"/>
-              </a:spcAft>
-              <a:defRPr sz="1300">
-                <a:solidFill>
-                  <a:srgbClr val="2D2D2D"/>
-                </a:solidFill>
-              </a:defRPr>
-            </a:pPr>
-            <a:r>
-              <a:t>Add-to-cart volume declined 77.5% from Jan 2026 to Mar 2026.</a:t>
-            </a:r>
-          </a:p>
-          <a:p>
-            <a:pPr>
-              <a:spcAft>
-                <a:spcPts val="1000"/>
-              </a:spcAft>
-              <a:defRPr sz="1300">
-                <a:solidFill>
-                  <a:srgbClr val="2D2D2D"/>
-                </a:solidFill>
-              </a:defRPr>
-            </a:pPr>
-            <a:r>
-              <a:t>CPATC rose 90.5% across the same period.</a:t>
-            </a:r>
-          </a:p>
-          <a:p>
-            <a:pPr>
-              <a:spcAft>
-                <a:spcPts val="1000"/>
-              </a:spcAft>
-              <a:defRPr sz="1300">
-                <a:solidFill>
-                  <a:srgbClr val="2D2D2D"/>
-                </a:solidFill>
-              </a:defRPr>
-            </a:pPr>
-            <a:r>
-              <a:t>Both add-to-cart volume and revenue decreased in the latest period.</a:t>
-            </a:r>
-          </a:p>
-          <a:p>
-            <a:pPr>
-              <a:spcAft>
-                <a:spcPts val="1000"/>
-              </a:spcAft>
-              <a:defRPr sz="1300">
-                <a:solidFill>
-                  <a:srgbClr val="2D2D2D"/>
-                </a:solidFill>
-              </a:defRPr>
-            </a:pPr>
-            <a:r>
-              <a:t>Purchases totalled 187.2 across the period covered by the add-to-cart view.</a:t>
+              <a:t>Brand delivered 69.1% of revenue, while Generic accounted for 68.5% of spend.</a:t>
             </a:r>
           </a:p>
         </p:txBody>
